--- a/W11/2. W11S2 final/W11S2.pptx
+++ b/W11/2. W11S2 final/W11S2.pptx
@@ -267,7 +267,7 @@
 <file path=ppt/revisionInfo.xml><?xml version="1.0" encoding="utf-8"?>
 <p1510:revInfo xmlns:a="http://schemas.openxmlformats.org/drawingml/2006/main" xmlns:r="http://schemas.openxmlformats.org/officeDocument/2006/relationships" xmlns:p1510="http://schemas.microsoft.com/office/powerpoint/2015/10/main">
   <p1510:revLst>
-    <p1510:client id="{3E44ADA2-A345-4C7C-802A-87952D8E8E25}" v="56" dt="2025-04-09T09:24:05.301"/>
+    <p1510:client id="{7B5F526D-D128-424A-96BD-F26992A920DB}" v="1" dt="2026-02-24T09:22:52.933"/>
   </p1510:revLst>
 </p1510:revInfo>
 </file>
@@ -275,1825 +275,26 @@
 <file path=ppt/changesInfos/changesInfo1.xml><?xml version="1.0" encoding="utf-8"?>
 <pc:chgInfo xmlns:a="http://schemas.openxmlformats.org/drawingml/2006/main" xmlns:r="http://schemas.openxmlformats.org/officeDocument/2006/relationships" xmlns:ac="http://schemas.microsoft.com/office/drawing/2013/main/command" xmlns:pc="http://schemas.microsoft.com/office/powerpoint/2013/main/command">
   <pc:docChgLst>
-    <pc:chgData name="Matthieu De Mari" userId="dfb708c9-d8dc-439f-9a3b-c772bf4a311c" providerId="ADAL" clId="{C0B31450-7B68-452C-86E7-49BB4EB7FFCB}"/>
-    <pc:docChg chg="mod modSld modMainMaster">
-      <pc:chgData name="Matthieu De Mari" userId="dfb708c9-d8dc-439f-9a3b-c772bf4a311c" providerId="ADAL" clId="{C0B31450-7B68-452C-86E7-49BB4EB7FFCB}" dt="2023-02-26T10:52:52.346" v="9" actId="20577"/>
+    <pc:chgData name="Matthieu De Mari" userId="S::matthieu_demari@sutd.edu.sg::dfb708c9-d8dc-439f-9a3b-c772bf4a311c" providerId="AD" clId="Web-{7B5F526D-D128-424A-96BD-F26992A920DB}"/>
+    <pc:docChg chg="modSld">
+      <pc:chgData name="Matthieu De Mari" userId="S::matthieu_demari@sutd.edu.sg::dfb708c9-d8dc-439f-9a3b-c772bf4a311c" providerId="AD" clId="Web-{7B5F526D-D128-424A-96BD-F26992A920DB}" dt="2026-02-24T09:22:52.933" v="0" actId="20577"/>
       <pc:docMkLst>
         <pc:docMk/>
       </pc:docMkLst>
-      <pc:sldChg chg="modSp mod">
-        <pc:chgData name="Matthieu De Mari" userId="dfb708c9-d8dc-439f-9a3b-c772bf4a311c" providerId="ADAL" clId="{C0B31450-7B68-452C-86E7-49BB4EB7FFCB}" dt="2023-02-26T10:52:52.346" v="9" actId="20577"/>
-        <pc:sldMkLst>
-          <pc:docMk/>
-          <pc:sldMk cId="3961348234" sldId="257"/>
-        </pc:sldMkLst>
-      </pc:sldChg>
-      <pc:sldChg chg="modSp mod">
-        <pc:chgData name="Matthieu De Mari" userId="dfb708c9-d8dc-439f-9a3b-c772bf4a311c" providerId="ADAL" clId="{C0B31450-7B68-452C-86E7-49BB4EB7FFCB}" dt="2023-02-26T10:52:45.327" v="5" actId="20577"/>
-        <pc:sldMkLst>
-          <pc:docMk/>
-          <pc:sldMk cId="1040156172" sldId="377"/>
-        </pc:sldMkLst>
-      </pc:sldChg>
-      <pc:sldChg chg="modSp mod">
-        <pc:chgData name="Matthieu De Mari" userId="dfb708c9-d8dc-439f-9a3b-c772bf4a311c" providerId="ADAL" clId="{C0B31450-7B68-452C-86E7-49BB4EB7FFCB}" dt="2023-02-26T10:52:49.132" v="7" actId="20577"/>
-        <pc:sldMkLst>
-          <pc:docMk/>
-          <pc:sldMk cId="3442501962" sldId="691"/>
-        </pc:sldMkLst>
-      </pc:sldChg>
-      <pc:sldMasterChg chg="addSp mod">
-        <pc:chgData name="Matthieu De Mari" userId="dfb708c9-d8dc-439f-9a3b-c772bf4a311c" providerId="ADAL" clId="{C0B31450-7B68-452C-86E7-49BB4EB7FFCB}" dt="2023-02-26T10:52:08.160" v="0" actId="33475"/>
-        <pc:sldMasterMkLst>
-          <pc:docMk/>
-          <pc:sldMasterMk cId="2168708284" sldId="2147483648"/>
-        </pc:sldMasterMkLst>
-      </pc:sldMasterChg>
-    </pc:docChg>
-  </pc:docChgLst>
-  <pc:docChgLst>
-    <pc:chgData name="Matthieu De Mari" userId="dfb708c9-d8dc-439f-9a3b-c772bf4a311c" providerId="ADAL" clId="{7A4A2177-D0F3-4299-BC85-BB1CAEC13EEC}"/>
-    <pc:docChg chg="custSel addSld modSld delSection modSection">
-      <pc:chgData name="Matthieu De Mari" userId="dfb708c9-d8dc-439f-9a3b-c772bf4a311c" providerId="ADAL" clId="{7A4A2177-D0F3-4299-BC85-BB1CAEC13EEC}" dt="2023-09-07T08:10:39.869" v="183" actId="47"/>
-      <pc:docMkLst>
-        <pc:docMk/>
-      </pc:docMkLst>
-      <pc:sldChg chg="modSp mod">
-        <pc:chgData name="Matthieu De Mari" userId="dfb708c9-d8dc-439f-9a3b-c772bf4a311c" providerId="ADAL" clId="{7A4A2177-D0F3-4299-BC85-BB1CAEC13EEC}" dt="2023-09-07T08:06:01.738" v="0" actId="5793"/>
-        <pc:sldMkLst>
-          <pc:docMk/>
-          <pc:sldMk cId="967026721" sldId="641"/>
-        </pc:sldMkLst>
-      </pc:sldChg>
-      <pc:sldChg chg="modSp mod">
-        <pc:chgData name="Matthieu De Mari" userId="dfb708c9-d8dc-439f-9a3b-c772bf4a311c" providerId="ADAL" clId="{7A4A2177-D0F3-4299-BC85-BB1CAEC13EEC}" dt="2023-09-07T08:06:09.071" v="1" actId="5793"/>
-        <pc:sldMkLst>
-          <pc:docMk/>
-          <pc:sldMk cId="217772614" sldId="643"/>
-        </pc:sldMkLst>
-      </pc:sldChg>
       <pc:sldChg chg="modSp">
-        <pc:chgData name="Matthieu De Mari" userId="dfb708c9-d8dc-439f-9a3b-c772bf4a311c" providerId="ADAL" clId="{7A4A2177-D0F3-4299-BC85-BB1CAEC13EEC}" dt="2023-09-07T08:06:13.007" v="2" actId="5793"/>
-        <pc:sldMkLst>
-          <pc:docMk/>
-          <pc:sldMk cId="2381005527" sldId="645"/>
-        </pc:sldMkLst>
-      </pc:sldChg>
-      <pc:sldChg chg="modSp">
-        <pc:chgData name="Matthieu De Mari" userId="dfb708c9-d8dc-439f-9a3b-c772bf4a311c" providerId="ADAL" clId="{7A4A2177-D0F3-4299-BC85-BB1CAEC13EEC}" dt="2023-09-07T08:06:31.976" v="3" actId="5793"/>
-        <pc:sldMkLst>
-          <pc:docMk/>
-          <pc:sldMk cId="1233052627" sldId="649"/>
-        </pc:sldMkLst>
-      </pc:sldChg>
-      <pc:sldChg chg="modSp">
-        <pc:chgData name="Matthieu De Mari" userId="dfb708c9-d8dc-439f-9a3b-c772bf4a311c" providerId="ADAL" clId="{7A4A2177-D0F3-4299-BC85-BB1CAEC13EEC}" dt="2023-09-07T08:08:47.389" v="80"/>
-        <pc:sldMkLst>
-          <pc:docMk/>
-          <pc:sldMk cId="3643453173" sldId="652"/>
-        </pc:sldMkLst>
-      </pc:sldChg>
-      <pc:sldChg chg="modSp">
-        <pc:chgData name="Matthieu De Mari" userId="dfb708c9-d8dc-439f-9a3b-c772bf4a311c" providerId="ADAL" clId="{7A4A2177-D0F3-4299-BC85-BB1CAEC13EEC}" dt="2023-09-07T08:06:52.789" v="4" actId="5793"/>
-        <pc:sldMkLst>
-          <pc:docMk/>
-          <pc:sldMk cId="629423183" sldId="654"/>
-        </pc:sldMkLst>
-      </pc:sldChg>
-      <pc:sldChg chg="modSp mod">
-        <pc:chgData name="Matthieu De Mari" userId="dfb708c9-d8dc-439f-9a3b-c772bf4a311c" providerId="ADAL" clId="{7A4A2177-D0F3-4299-BC85-BB1CAEC13EEC}" dt="2023-09-07T08:07:20.104" v="7" actId="20577"/>
-        <pc:sldMkLst>
-          <pc:docMk/>
-          <pc:sldMk cId="1981122513" sldId="655"/>
-        </pc:sldMkLst>
-      </pc:sldChg>
-      <pc:sldChg chg="addSp delSp modSp new mod modClrScheme chgLayout">
-        <pc:chgData name="Matthieu De Mari" userId="dfb708c9-d8dc-439f-9a3b-c772bf4a311c" providerId="ADAL" clId="{7A4A2177-D0F3-4299-BC85-BB1CAEC13EEC}" dt="2023-09-07T08:09:52.274" v="180" actId="20577"/>
-        <pc:sldMkLst>
-          <pc:docMk/>
-          <pc:sldMk cId="260732904" sldId="694"/>
-        </pc:sldMkLst>
-      </pc:sldChg>
-    </pc:docChg>
-  </pc:docChgLst>
-  <pc:docChgLst>
-    <pc:chgData name="Matthieu De Mari" userId="dfb708c9-d8dc-439f-9a3b-c772bf4a311c" providerId="ADAL" clId="{006BFA40-FF42-45C6-B690-6E81382D1063}"/>
-    <pc:docChg chg="delSld modSection">
-      <pc:chgData name="Matthieu De Mari" userId="dfb708c9-d8dc-439f-9a3b-c772bf4a311c" providerId="ADAL" clId="{006BFA40-FF42-45C6-B690-6E81382D1063}" dt="2023-04-03T05:25:51.199" v="0" actId="2696"/>
-      <pc:docMkLst>
-        <pc:docMk/>
-      </pc:docMkLst>
-      <pc:sldChg chg="del">
-        <pc:chgData name="Matthieu De Mari" userId="dfb708c9-d8dc-439f-9a3b-c772bf4a311c" providerId="ADAL" clId="{006BFA40-FF42-45C6-B690-6E81382D1063}" dt="2023-04-03T05:25:51.199" v="0" actId="2696"/>
-        <pc:sldMkLst>
-          <pc:docMk/>
-          <pc:sldMk cId="2211946059" sldId="633"/>
-        </pc:sldMkLst>
-      </pc:sldChg>
-      <pc:sldChg chg="del">
-        <pc:chgData name="Matthieu De Mari" userId="dfb708c9-d8dc-439f-9a3b-c772bf4a311c" providerId="ADAL" clId="{006BFA40-FF42-45C6-B690-6E81382D1063}" dt="2023-04-03T05:25:51.199" v="0" actId="2696"/>
-        <pc:sldMkLst>
-          <pc:docMk/>
-          <pc:sldMk cId="1608646243" sldId="635"/>
-        </pc:sldMkLst>
-      </pc:sldChg>
-      <pc:sldChg chg="del">
-        <pc:chgData name="Matthieu De Mari" userId="dfb708c9-d8dc-439f-9a3b-c772bf4a311c" providerId="ADAL" clId="{006BFA40-FF42-45C6-B690-6E81382D1063}" dt="2023-04-03T05:25:51.199" v="0" actId="2696"/>
-        <pc:sldMkLst>
-          <pc:docMk/>
-          <pc:sldMk cId="767657182" sldId="636"/>
-        </pc:sldMkLst>
-      </pc:sldChg>
-      <pc:sldChg chg="del">
-        <pc:chgData name="Matthieu De Mari" userId="dfb708c9-d8dc-439f-9a3b-c772bf4a311c" providerId="ADAL" clId="{006BFA40-FF42-45C6-B690-6E81382D1063}" dt="2023-04-03T05:25:51.199" v="0" actId="2696"/>
-        <pc:sldMkLst>
-          <pc:docMk/>
-          <pc:sldMk cId="3875543137" sldId="637"/>
-        </pc:sldMkLst>
-      </pc:sldChg>
-      <pc:sldChg chg="del">
-        <pc:chgData name="Matthieu De Mari" userId="dfb708c9-d8dc-439f-9a3b-c772bf4a311c" providerId="ADAL" clId="{006BFA40-FF42-45C6-B690-6E81382D1063}" dt="2023-04-03T05:25:51.199" v="0" actId="2696"/>
-        <pc:sldMkLst>
-          <pc:docMk/>
-          <pc:sldMk cId="2599086613" sldId="638"/>
-        </pc:sldMkLst>
-      </pc:sldChg>
-      <pc:sldChg chg="del">
-        <pc:chgData name="Matthieu De Mari" userId="dfb708c9-d8dc-439f-9a3b-c772bf4a311c" providerId="ADAL" clId="{006BFA40-FF42-45C6-B690-6E81382D1063}" dt="2023-04-03T05:25:51.199" v="0" actId="2696"/>
-        <pc:sldMkLst>
-          <pc:docMk/>
-          <pc:sldMk cId="1063985533" sldId="669"/>
-        </pc:sldMkLst>
-      </pc:sldChg>
-      <pc:sldChg chg="del">
-        <pc:chgData name="Matthieu De Mari" userId="dfb708c9-d8dc-439f-9a3b-c772bf4a311c" providerId="ADAL" clId="{006BFA40-FF42-45C6-B690-6E81382D1063}" dt="2023-04-03T05:25:51.199" v="0" actId="2696"/>
-        <pc:sldMkLst>
-          <pc:docMk/>
-          <pc:sldMk cId="3002271023" sldId="670"/>
-        </pc:sldMkLst>
-      </pc:sldChg>
-      <pc:sldChg chg="del">
-        <pc:chgData name="Matthieu De Mari" userId="dfb708c9-d8dc-439f-9a3b-c772bf4a311c" providerId="ADAL" clId="{006BFA40-FF42-45C6-B690-6E81382D1063}" dt="2023-04-03T05:25:51.199" v="0" actId="2696"/>
-        <pc:sldMkLst>
-          <pc:docMk/>
-          <pc:sldMk cId="278028184" sldId="671"/>
-        </pc:sldMkLst>
-      </pc:sldChg>
-      <pc:sldChg chg="del">
-        <pc:chgData name="Matthieu De Mari" userId="dfb708c9-d8dc-439f-9a3b-c772bf4a311c" providerId="ADAL" clId="{006BFA40-FF42-45C6-B690-6E81382D1063}" dt="2023-04-03T05:25:51.199" v="0" actId="2696"/>
-        <pc:sldMkLst>
-          <pc:docMk/>
-          <pc:sldMk cId="3241301084" sldId="672"/>
-        </pc:sldMkLst>
-      </pc:sldChg>
-      <pc:sldChg chg="del">
-        <pc:chgData name="Matthieu De Mari" userId="dfb708c9-d8dc-439f-9a3b-c772bf4a311c" providerId="ADAL" clId="{006BFA40-FF42-45C6-B690-6E81382D1063}" dt="2023-04-03T05:25:51.199" v="0" actId="2696"/>
-        <pc:sldMkLst>
-          <pc:docMk/>
-          <pc:sldMk cId="4015266761" sldId="673"/>
-        </pc:sldMkLst>
-      </pc:sldChg>
-      <pc:sldChg chg="del">
-        <pc:chgData name="Matthieu De Mari" userId="dfb708c9-d8dc-439f-9a3b-c772bf4a311c" providerId="ADAL" clId="{006BFA40-FF42-45C6-B690-6E81382D1063}" dt="2023-04-03T05:25:51.199" v="0" actId="2696"/>
-        <pc:sldMkLst>
-          <pc:docMk/>
-          <pc:sldMk cId="4136466441" sldId="674"/>
-        </pc:sldMkLst>
-      </pc:sldChg>
-      <pc:sldChg chg="del">
-        <pc:chgData name="Matthieu De Mari" userId="dfb708c9-d8dc-439f-9a3b-c772bf4a311c" providerId="ADAL" clId="{006BFA40-FF42-45C6-B690-6E81382D1063}" dt="2023-04-03T05:25:51.199" v="0" actId="2696"/>
-        <pc:sldMkLst>
-          <pc:docMk/>
-          <pc:sldMk cId="2421120945" sldId="675"/>
-        </pc:sldMkLst>
-      </pc:sldChg>
-      <pc:sldChg chg="del">
-        <pc:chgData name="Matthieu De Mari" userId="dfb708c9-d8dc-439f-9a3b-c772bf4a311c" providerId="ADAL" clId="{006BFA40-FF42-45C6-B690-6E81382D1063}" dt="2023-04-03T05:25:51.199" v="0" actId="2696"/>
-        <pc:sldMkLst>
-          <pc:docMk/>
-          <pc:sldMk cId="2006486705" sldId="676"/>
-        </pc:sldMkLst>
-      </pc:sldChg>
-      <pc:sldChg chg="del">
-        <pc:chgData name="Matthieu De Mari" userId="dfb708c9-d8dc-439f-9a3b-c772bf4a311c" providerId="ADAL" clId="{006BFA40-FF42-45C6-B690-6E81382D1063}" dt="2023-04-03T05:25:51.199" v="0" actId="2696"/>
-        <pc:sldMkLst>
-          <pc:docMk/>
-          <pc:sldMk cId="3985725824" sldId="677"/>
-        </pc:sldMkLst>
-      </pc:sldChg>
-      <pc:sldChg chg="del">
-        <pc:chgData name="Matthieu De Mari" userId="dfb708c9-d8dc-439f-9a3b-c772bf4a311c" providerId="ADAL" clId="{006BFA40-FF42-45C6-B690-6E81382D1063}" dt="2023-04-03T05:25:51.199" v="0" actId="2696"/>
-        <pc:sldMkLst>
-          <pc:docMk/>
-          <pc:sldMk cId="2758040485" sldId="678"/>
-        </pc:sldMkLst>
-      </pc:sldChg>
-      <pc:sldChg chg="del">
-        <pc:chgData name="Matthieu De Mari" userId="dfb708c9-d8dc-439f-9a3b-c772bf4a311c" providerId="ADAL" clId="{006BFA40-FF42-45C6-B690-6E81382D1063}" dt="2023-04-03T05:25:51.199" v="0" actId="2696"/>
-        <pc:sldMkLst>
-          <pc:docMk/>
-          <pc:sldMk cId="2017719165" sldId="679"/>
-        </pc:sldMkLst>
-      </pc:sldChg>
-      <pc:sldChg chg="del">
-        <pc:chgData name="Matthieu De Mari" userId="dfb708c9-d8dc-439f-9a3b-c772bf4a311c" providerId="ADAL" clId="{006BFA40-FF42-45C6-B690-6E81382D1063}" dt="2023-04-03T05:25:51.199" v="0" actId="2696"/>
-        <pc:sldMkLst>
-          <pc:docMk/>
-          <pc:sldMk cId="707497519" sldId="694"/>
-        </pc:sldMkLst>
-      </pc:sldChg>
-    </pc:docChg>
-  </pc:docChgLst>
-  <pc:docChgLst>
-    <pc:chgData name="Matthieu De Mari" userId="dfb708c9-d8dc-439f-9a3b-c772bf4a311c" providerId="ADAL" clId="{13C898AD-E98D-4667-88CB-9EFF0EF7037D}"/>
-    <pc:docChg chg="modSld">
-      <pc:chgData name="Matthieu De Mari" userId="dfb708c9-d8dc-439f-9a3b-c772bf4a311c" providerId="ADAL" clId="{13C898AD-E98D-4667-88CB-9EFF0EF7037D}" dt="2024-04-09T03:18:08.097" v="1" actId="20577"/>
-      <pc:docMkLst>
-        <pc:docMk/>
-      </pc:docMkLst>
-      <pc:sldChg chg="modSp mod">
-        <pc:chgData name="Matthieu De Mari" userId="dfb708c9-d8dc-439f-9a3b-c772bf4a311c" providerId="ADAL" clId="{13C898AD-E98D-4667-88CB-9EFF0EF7037D}" dt="2024-04-09T03:18:08.097" v="1" actId="20577"/>
-        <pc:sldMkLst>
-          <pc:docMk/>
-          <pc:sldMk cId="1040156172" sldId="377"/>
-        </pc:sldMkLst>
-      </pc:sldChg>
-    </pc:docChg>
-  </pc:docChgLst>
-  <pc:docChgLst>
-    <pc:chgData name="Matthieu De Mari" userId="dfb708c9-d8dc-439f-9a3b-c772bf4a311c" providerId="ADAL" clId="{A43FC9A0-DA79-4390-BD87-6FC76071A2D1}"/>
-    <pc:docChg chg="undo custSel addSld delSld modSld sldOrd addSection delSection modSection">
-      <pc:chgData name="Matthieu De Mari" userId="dfb708c9-d8dc-439f-9a3b-c772bf4a311c" providerId="ADAL" clId="{A43FC9A0-DA79-4390-BD87-6FC76071A2D1}" dt="2025-02-05T05:46:15.370" v="4296" actId="20577"/>
-      <pc:docMkLst>
-        <pc:docMk/>
-      </pc:docMkLst>
-      <pc:sldChg chg="modSp mod">
-        <pc:chgData name="Matthieu De Mari" userId="dfb708c9-d8dc-439f-9a3b-c772bf4a311c" providerId="ADAL" clId="{A43FC9A0-DA79-4390-BD87-6FC76071A2D1}" dt="2025-02-05T05:10:02.033" v="1990" actId="20577"/>
-        <pc:sldMkLst>
-          <pc:docMk/>
-          <pc:sldMk cId="1624737128" sldId="267"/>
-        </pc:sldMkLst>
-        <pc:spChg chg="mod">
-          <ac:chgData name="Matthieu De Mari" userId="dfb708c9-d8dc-439f-9a3b-c772bf4a311c" providerId="ADAL" clId="{A43FC9A0-DA79-4390-BD87-6FC76071A2D1}" dt="2025-02-05T05:10:02.033" v="1990" actId="20577"/>
-          <ac:spMkLst>
-            <pc:docMk/>
-            <pc:sldMk cId="1624737128" sldId="267"/>
-            <ac:spMk id="3" creationId="{C71C8DD6-14D1-44DF-9843-EFEDF44E39A2}"/>
-          </ac:spMkLst>
-        </pc:spChg>
-      </pc:sldChg>
-      <pc:sldChg chg="del">
-        <pc:chgData name="Matthieu De Mari" userId="dfb708c9-d8dc-439f-9a3b-c772bf4a311c" providerId="ADAL" clId="{A43FC9A0-DA79-4390-BD87-6FC76071A2D1}" dt="2025-02-05T05:10:09.783" v="1991" actId="47"/>
-        <pc:sldMkLst>
-          <pc:docMk/>
-          <pc:sldMk cId="2320791774" sldId="535"/>
-        </pc:sldMkLst>
-      </pc:sldChg>
-      <pc:sldChg chg="addSp delSp modSp mod">
-        <pc:chgData name="Matthieu De Mari" userId="dfb708c9-d8dc-439f-9a3b-c772bf4a311c" providerId="ADAL" clId="{A43FC9A0-DA79-4390-BD87-6FC76071A2D1}" dt="2025-02-05T04:48:26.589" v="56"/>
-        <pc:sldMkLst>
-          <pc:docMk/>
-          <pc:sldMk cId="3998587263" sldId="604"/>
-        </pc:sldMkLst>
-        <pc:picChg chg="add mod">
-          <ac:chgData name="Matthieu De Mari" userId="dfb708c9-d8dc-439f-9a3b-c772bf4a311c" providerId="ADAL" clId="{A43FC9A0-DA79-4390-BD87-6FC76071A2D1}" dt="2025-02-05T04:48:26.589" v="56"/>
-          <ac:picMkLst>
-            <pc:docMk/>
-            <pc:sldMk cId="3998587263" sldId="604"/>
-            <ac:picMk id="8" creationId="{67D24194-2CD3-AA22-A2FC-A22087205A41}"/>
-          </ac:picMkLst>
-        </pc:picChg>
-      </pc:sldChg>
-      <pc:sldChg chg="addSp delSp modSp del mod">
-        <pc:chgData name="Matthieu De Mari" userId="dfb708c9-d8dc-439f-9a3b-c772bf4a311c" providerId="ADAL" clId="{A43FC9A0-DA79-4390-BD87-6FC76071A2D1}" dt="2025-02-05T04:48:38.560" v="59" actId="47"/>
-        <pc:sldMkLst>
-          <pc:docMk/>
-          <pc:sldMk cId="3380515668" sldId="606"/>
-        </pc:sldMkLst>
-      </pc:sldChg>
-      <pc:sldChg chg="addSp delSp modSp mod">
-        <pc:chgData name="Matthieu De Mari" userId="dfb708c9-d8dc-439f-9a3b-c772bf4a311c" providerId="ADAL" clId="{A43FC9A0-DA79-4390-BD87-6FC76071A2D1}" dt="2025-02-05T04:56:29.230" v="1075" actId="20577"/>
-        <pc:sldMkLst>
-          <pc:docMk/>
-          <pc:sldMk cId="12367321" sldId="607"/>
-        </pc:sldMkLst>
-        <pc:spChg chg="mod">
-          <ac:chgData name="Matthieu De Mari" userId="dfb708c9-d8dc-439f-9a3b-c772bf4a311c" providerId="ADAL" clId="{A43FC9A0-DA79-4390-BD87-6FC76071A2D1}" dt="2025-02-05T04:48:59.719" v="71" actId="20577"/>
-          <ac:spMkLst>
-            <pc:docMk/>
-            <pc:sldMk cId="12367321" sldId="607"/>
-            <ac:spMk id="3" creationId="{DB541362-A8AA-464D-B350-469D0E6EFF51}"/>
-          </ac:spMkLst>
-        </pc:spChg>
-        <pc:spChg chg="mod">
-          <ac:chgData name="Matthieu De Mari" userId="dfb708c9-d8dc-439f-9a3b-c772bf4a311c" providerId="ADAL" clId="{A43FC9A0-DA79-4390-BD87-6FC76071A2D1}" dt="2025-02-05T04:56:29.230" v="1075" actId="20577"/>
-          <ac:spMkLst>
-            <pc:docMk/>
-            <pc:sldMk cId="12367321" sldId="607"/>
-            <ac:spMk id="4" creationId="{1AAED375-7E41-42A6-B735-F3D5A7E83785}"/>
-          </ac:spMkLst>
-        </pc:spChg>
-        <pc:picChg chg="add mod">
-          <ac:chgData name="Matthieu De Mari" userId="dfb708c9-d8dc-439f-9a3b-c772bf4a311c" providerId="ADAL" clId="{A43FC9A0-DA79-4390-BD87-6FC76071A2D1}" dt="2025-02-05T04:48:28.590" v="57"/>
-          <ac:picMkLst>
-            <pc:docMk/>
-            <pc:sldMk cId="12367321" sldId="607"/>
-            <ac:picMk id="6" creationId="{8367360F-03BE-C627-274D-82AA6B50D486}"/>
-          </ac:picMkLst>
-        </pc:picChg>
-        <pc:cxnChg chg="add">
-          <ac:chgData name="Matthieu De Mari" userId="dfb708c9-d8dc-439f-9a3b-c772bf4a311c" providerId="ADAL" clId="{A43FC9A0-DA79-4390-BD87-6FC76071A2D1}" dt="2025-02-05T04:49:08.507" v="72" actId="11529"/>
-          <ac:cxnSpMkLst>
-            <pc:docMk/>
-            <pc:sldMk cId="12367321" sldId="607"/>
-            <ac:cxnSpMk id="9" creationId="{44BDB080-18F1-A989-137B-602B12A82BCF}"/>
-          </ac:cxnSpMkLst>
-        </pc:cxnChg>
-      </pc:sldChg>
-      <pc:sldChg chg="addSp delSp modSp mod">
-        <pc:chgData name="Matthieu De Mari" userId="dfb708c9-d8dc-439f-9a3b-c772bf4a311c" providerId="ADAL" clId="{A43FC9A0-DA79-4390-BD87-6FC76071A2D1}" dt="2025-02-05T04:48:21.369" v="52"/>
-        <pc:sldMkLst>
-          <pc:docMk/>
-          <pc:sldMk cId="232896370" sldId="608"/>
-        </pc:sldMkLst>
-        <pc:spChg chg="mod">
-          <ac:chgData name="Matthieu De Mari" userId="dfb708c9-d8dc-439f-9a3b-c772bf4a311c" providerId="ADAL" clId="{A43FC9A0-DA79-4390-BD87-6FC76071A2D1}" dt="2025-02-05T04:48:07.713" v="48" actId="27636"/>
-          <ac:spMkLst>
-            <pc:docMk/>
-            <pc:sldMk cId="232896370" sldId="608"/>
-            <ac:spMk id="4" creationId="{1AAED375-7E41-42A6-B735-F3D5A7E83785}"/>
-          </ac:spMkLst>
-        </pc:spChg>
-        <pc:picChg chg="add mod">
-          <ac:chgData name="Matthieu De Mari" userId="dfb708c9-d8dc-439f-9a3b-c772bf4a311c" providerId="ADAL" clId="{A43FC9A0-DA79-4390-BD87-6FC76071A2D1}" dt="2025-02-05T04:48:21.369" v="52"/>
-          <ac:picMkLst>
-            <pc:docMk/>
-            <pc:sldMk cId="232896370" sldId="608"/>
-            <ac:picMk id="6" creationId="{5287D79C-E385-45DE-92DE-071CA30C0DDD}"/>
-          </ac:picMkLst>
-        </pc:picChg>
-      </pc:sldChg>
-      <pc:sldChg chg="addSp delSp modSp mod">
-        <pc:chgData name="Matthieu De Mari" userId="dfb708c9-d8dc-439f-9a3b-c772bf4a311c" providerId="ADAL" clId="{A43FC9A0-DA79-4390-BD87-6FC76071A2D1}" dt="2025-02-05T04:50:36.402" v="242" actId="6549"/>
-        <pc:sldMkLst>
-          <pc:docMk/>
-          <pc:sldMk cId="1235188203" sldId="609"/>
-        </pc:sldMkLst>
-        <pc:spChg chg="mod">
-          <ac:chgData name="Matthieu De Mari" userId="dfb708c9-d8dc-439f-9a3b-c772bf4a311c" providerId="ADAL" clId="{A43FC9A0-DA79-4390-BD87-6FC76071A2D1}" dt="2025-02-05T04:50:36.402" v="242" actId="6549"/>
-          <ac:spMkLst>
-            <pc:docMk/>
-            <pc:sldMk cId="1235188203" sldId="609"/>
-            <ac:spMk id="4" creationId="{1AAED375-7E41-42A6-B735-F3D5A7E83785}"/>
-          </ac:spMkLst>
-        </pc:spChg>
-        <pc:picChg chg="add mod">
-          <ac:chgData name="Matthieu De Mari" userId="dfb708c9-d8dc-439f-9a3b-c772bf4a311c" providerId="ADAL" clId="{A43FC9A0-DA79-4390-BD87-6FC76071A2D1}" dt="2025-02-05T04:48:29.690" v="58"/>
-          <ac:picMkLst>
-            <pc:docMk/>
-            <pc:sldMk cId="1235188203" sldId="609"/>
-            <ac:picMk id="3" creationId="{98EBEABB-15AC-F5DD-696E-6F1EDE05F87C}"/>
-          </ac:picMkLst>
-        </pc:picChg>
-        <pc:cxnChg chg="add mod">
-          <ac:chgData name="Matthieu De Mari" userId="dfb708c9-d8dc-439f-9a3b-c772bf4a311c" providerId="ADAL" clId="{A43FC9A0-DA79-4390-BD87-6FC76071A2D1}" dt="2025-02-05T04:49:17.490" v="73"/>
-          <ac:cxnSpMkLst>
-            <pc:docMk/>
-            <pc:sldMk cId="1235188203" sldId="609"/>
-            <ac:cxnSpMk id="5" creationId="{2C8B76EA-9D89-5195-7E53-D3FA06A48021}"/>
-          </ac:cxnSpMkLst>
-        </pc:cxnChg>
-      </pc:sldChg>
-      <pc:sldChg chg="modSp mod">
-        <pc:chgData name="Matthieu De Mari" userId="dfb708c9-d8dc-439f-9a3b-c772bf4a311c" providerId="ADAL" clId="{A43FC9A0-DA79-4390-BD87-6FC76071A2D1}" dt="2025-02-05T04:55:26.499" v="1032" actId="20577"/>
-        <pc:sldMkLst>
-          <pc:docMk/>
-          <pc:sldMk cId="2698682635" sldId="610"/>
-        </pc:sldMkLst>
-        <pc:spChg chg="mod">
-          <ac:chgData name="Matthieu De Mari" userId="dfb708c9-d8dc-439f-9a3b-c772bf4a311c" providerId="ADAL" clId="{A43FC9A0-DA79-4390-BD87-6FC76071A2D1}" dt="2025-02-05T04:55:26.499" v="1032" actId="20577"/>
-          <ac:spMkLst>
-            <pc:docMk/>
-            <pc:sldMk cId="2698682635" sldId="610"/>
-            <ac:spMk id="4" creationId="{1AAED375-7E41-42A6-B735-F3D5A7E83785}"/>
-          </ac:spMkLst>
-        </pc:spChg>
-      </pc:sldChg>
-      <pc:sldChg chg="modSp mod">
-        <pc:chgData name="Matthieu De Mari" userId="dfb708c9-d8dc-439f-9a3b-c772bf4a311c" providerId="ADAL" clId="{A43FC9A0-DA79-4390-BD87-6FC76071A2D1}" dt="2025-02-05T05:04:47.632" v="1541" actId="20577"/>
-        <pc:sldMkLst>
-          <pc:docMk/>
-          <pc:sldMk cId="324111392" sldId="615"/>
-        </pc:sldMkLst>
-        <pc:spChg chg="mod">
-          <ac:chgData name="Matthieu De Mari" userId="dfb708c9-d8dc-439f-9a3b-c772bf4a311c" providerId="ADAL" clId="{A43FC9A0-DA79-4390-BD87-6FC76071A2D1}" dt="2025-02-05T05:04:47.632" v="1541" actId="20577"/>
-          <ac:spMkLst>
-            <pc:docMk/>
-            <pc:sldMk cId="324111392" sldId="615"/>
-            <ac:spMk id="3" creationId="{D93E1973-8299-4953-A95B-1FF434A37CE5}"/>
-          </ac:spMkLst>
-        </pc:spChg>
-      </pc:sldChg>
-      <pc:sldChg chg="modSp mod">
-        <pc:chgData name="Matthieu De Mari" userId="dfb708c9-d8dc-439f-9a3b-c772bf4a311c" providerId="ADAL" clId="{A43FC9A0-DA79-4390-BD87-6FC76071A2D1}" dt="2025-02-05T05:21:24.910" v="2573"/>
-        <pc:sldMkLst>
-          <pc:docMk/>
-          <pc:sldMk cId="690046862" sldId="616"/>
-        </pc:sldMkLst>
-        <pc:spChg chg="mod">
-          <ac:chgData name="Matthieu De Mari" userId="dfb708c9-d8dc-439f-9a3b-c772bf4a311c" providerId="ADAL" clId="{A43FC9A0-DA79-4390-BD87-6FC76071A2D1}" dt="2025-02-05T05:21:24.910" v="2573"/>
-          <ac:spMkLst>
-            <pc:docMk/>
-            <pc:sldMk cId="690046862" sldId="616"/>
-            <ac:spMk id="2" creationId="{4C5A6C23-8B45-4EFF-A88B-FF857D0DB06F}"/>
-          </ac:spMkLst>
-        </pc:spChg>
-        <pc:spChg chg="mod">
-          <ac:chgData name="Matthieu De Mari" userId="dfb708c9-d8dc-439f-9a3b-c772bf4a311c" providerId="ADAL" clId="{A43FC9A0-DA79-4390-BD87-6FC76071A2D1}" dt="2025-02-05T05:05:04.916" v="1562" actId="20577"/>
-          <ac:spMkLst>
-            <pc:docMk/>
-            <pc:sldMk cId="690046862" sldId="616"/>
-            <ac:spMk id="3" creationId="{D93E1973-8299-4953-A95B-1FF434A37CE5}"/>
-          </ac:spMkLst>
-        </pc:spChg>
-      </pc:sldChg>
-      <pc:sldChg chg="modSp mod">
-        <pc:chgData name="Matthieu De Mari" userId="dfb708c9-d8dc-439f-9a3b-c772bf4a311c" providerId="ADAL" clId="{A43FC9A0-DA79-4390-BD87-6FC76071A2D1}" dt="2025-02-05T05:23:03.742" v="2846"/>
-        <pc:sldMkLst>
-          <pc:docMk/>
-          <pc:sldMk cId="1114995873" sldId="617"/>
-        </pc:sldMkLst>
-        <pc:spChg chg="mod">
-          <ac:chgData name="Matthieu De Mari" userId="dfb708c9-d8dc-439f-9a3b-c772bf4a311c" providerId="ADAL" clId="{A43FC9A0-DA79-4390-BD87-6FC76071A2D1}" dt="2025-02-05T05:23:03.742" v="2846"/>
-          <ac:spMkLst>
-            <pc:docMk/>
-            <pc:sldMk cId="1114995873" sldId="617"/>
-            <ac:spMk id="3" creationId="{18F81686-D0E3-4F7E-9DF0-29DC137713E7}"/>
-          </ac:spMkLst>
-        </pc:spChg>
-      </pc:sldChg>
-      <pc:sldChg chg="addSp delSp modSp mod">
-        <pc:chgData name="Matthieu De Mari" userId="dfb708c9-d8dc-439f-9a3b-c772bf4a311c" providerId="ADAL" clId="{A43FC9A0-DA79-4390-BD87-6FC76071A2D1}" dt="2025-02-05T04:48:18.843" v="50" actId="14100"/>
-        <pc:sldMkLst>
-          <pc:docMk/>
-          <pc:sldMk cId="4283000246" sldId="618"/>
-        </pc:sldMkLst>
-        <pc:picChg chg="add mod">
-          <ac:chgData name="Matthieu De Mari" userId="dfb708c9-d8dc-439f-9a3b-c772bf4a311c" providerId="ADAL" clId="{A43FC9A0-DA79-4390-BD87-6FC76071A2D1}" dt="2025-02-05T04:48:18.843" v="50" actId="14100"/>
-          <ac:picMkLst>
-            <pc:docMk/>
-            <pc:sldMk cId="4283000246" sldId="618"/>
-            <ac:picMk id="3" creationId="{C759A094-0B93-E174-09B1-F3B32479F047}"/>
-          </ac:picMkLst>
-        </pc:picChg>
-      </pc:sldChg>
-      <pc:sldChg chg="addSp delSp modSp mod">
-        <pc:chgData name="Matthieu De Mari" userId="dfb708c9-d8dc-439f-9a3b-c772bf4a311c" providerId="ADAL" clId="{A43FC9A0-DA79-4390-BD87-6FC76071A2D1}" dt="2025-02-05T05:21:02.047" v="2560"/>
-        <pc:sldMkLst>
-          <pc:docMk/>
-          <pc:sldMk cId="2225562590" sldId="625"/>
-        </pc:sldMkLst>
-        <pc:spChg chg="mod">
-          <ac:chgData name="Matthieu De Mari" userId="dfb708c9-d8dc-439f-9a3b-c772bf4a311c" providerId="ADAL" clId="{A43FC9A0-DA79-4390-BD87-6FC76071A2D1}" dt="2025-02-05T05:21:02.047" v="2560"/>
-          <ac:spMkLst>
-            <pc:docMk/>
-            <pc:sldMk cId="2225562590" sldId="625"/>
-            <ac:spMk id="2" creationId="{4C5A6C23-8B45-4EFF-A88B-FF857D0DB06F}"/>
-          </ac:spMkLst>
-        </pc:spChg>
-        <pc:spChg chg="mod">
-          <ac:chgData name="Matthieu De Mari" userId="dfb708c9-d8dc-439f-9a3b-c772bf4a311c" providerId="ADAL" clId="{A43FC9A0-DA79-4390-BD87-6FC76071A2D1}" dt="2025-02-05T05:06:08.259" v="1620" actId="20577"/>
-          <ac:spMkLst>
-            <pc:docMk/>
-            <pc:sldMk cId="2225562590" sldId="625"/>
-            <ac:spMk id="3" creationId="{D93E1973-8299-4953-A95B-1FF434A37CE5}"/>
-          </ac:spMkLst>
-        </pc:spChg>
-        <pc:picChg chg="add mod">
-          <ac:chgData name="Matthieu De Mari" userId="dfb708c9-d8dc-439f-9a3b-c772bf4a311c" providerId="ADAL" clId="{A43FC9A0-DA79-4390-BD87-6FC76071A2D1}" dt="2025-02-05T05:06:10.419" v="1621"/>
-          <ac:picMkLst>
-            <pc:docMk/>
-            <pc:sldMk cId="2225562590" sldId="625"/>
-            <ac:picMk id="4" creationId="{ACD4FA92-A4B1-9A9A-DE0C-08A7AB932CA7}"/>
-          </ac:picMkLst>
-        </pc:picChg>
-      </pc:sldChg>
-      <pc:sldChg chg="addSp delSp modSp mod">
-        <pc:chgData name="Matthieu De Mari" userId="dfb708c9-d8dc-439f-9a3b-c772bf4a311c" providerId="ADAL" clId="{A43FC9A0-DA79-4390-BD87-6FC76071A2D1}" dt="2025-02-05T05:19:06.941" v="2408" actId="20577"/>
-        <pc:sldMkLst>
-          <pc:docMk/>
-          <pc:sldMk cId="478223017" sldId="626"/>
-        </pc:sldMkLst>
-        <pc:spChg chg="mod">
-          <ac:chgData name="Matthieu De Mari" userId="dfb708c9-d8dc-439f-9a3b-c772bf4a311c" providerId="ADAL" clId="{A43FC9A0-DA79-4390-BD87-6FC76071A2D1}" dt="2025-02-05T05:19:06.941" v="2408" actId="20577"/>
-          <ac:spMkLst>
-            <pc:docMk/>
-            <pc:sldMk cId="478223017" sldId="626"/>
-            <ac:spMk id="2" creationId="{4C5A6C23-8B45-4EFF-A88B-FF857D0DB06F}"/>
-          </ac:spMkLst>
-        </pc:spChg>
-        <pc:spChg chg="mod">
-          <ac:chgData name="Matthieu De Mari" userId="dfb708c9-d8dc-439f-9a3b-c772bf4a311c" providerId="ADAL" clId="{A43FC9A0-DA79-4390-BD87-6FC76071A2D1}" dt="2025-02-05T05:19:04.049" v="2406" actId="21"/>
-          <ac:spMkLst>
-            <pc:docMk/>
-            <pc:sldMk cId="478223017" sldId="626"/>
-            <ac:spMk id="3" creationId="{D93E1973-8299-4953-A95B-1FF434A37CE5}"/>
-          </ac:spMkLst>
-        </pc:spChg>
-        <pc:picChg chg="add mod">
-          <ac:chgData name="Matthieu De Mari" userId="dfb708c9-d8dc-439f-9a3b-c772bf4a311c" providerId="ADAL" clId="{A43FC9A0-DA79-4390-BD87-6FC76071A2D1}" dt="2025-02-05T05:06:02.292" v="1618" actId="1036"/>
-          <ac:picMkLst>
-            <pc:docMk/>
-            <pc:sldMk cId="478223017" sldId="626"/>
-            <ac:picMk id="4" creationId="{B2CAED7D-9D04-E9DB-EFF6-31A61B819AEE}"/>
-          </ac:picMkLst>
-        </pc:picChg>
-      </pc:sldChg>
-      <pc:sldChg chg="addSp delSp modSp mod">
-        <pc:chgData name="Matthieu De Mari" userId="dfb708c9-d8dc-439f-9a3b-c772bf4a311c" providerId="ADAL" clId="{A43FC9A0-DA79-4390-BD87-6FC76071A2D1}" dt="2025-02-05T05:20:41.900" v="2558" actId="20577"/>
-        <pc:sldMkLst>
-          <pc:docMk/>
-          <pc:sldMk cId="3314089761" sldId="627"/>
-        </pc:sldMkLst>
-        <pc:spChg chg="mod">
-          <ac:chgData name="Matthieu De Mari" userId="dfb708c9-d8dc-439f-9a3b-c772bf4a311c" providerId="ADAL" clId="{A43FC9A0-DA79-4390-BD87-6FC76071A2D1}" dt="2025-02-05T05:20:41.900" v="2558" actId="20577"/>
-          <ac:spMkLst>
-            <pc:docMk/>
-            <pc:sldMk cId="3314089761" sldId="627"/>
-            <ac:spMk id="3" creationId="{D93E1973-8299-4953-A95B-1FF434A37CE5}"/>
-          </ac:spMkLst>
-        </pc:spChg>
-        <pc:picChg chg="add mod">
-          <ac:chgData name="Matthieu De Mari" userId="dfb708c9-d8dc-439f-9a3b-c772bf4a311c" providerId="ADAL" clId="{A43FC9A0-DA79-4390-BD87-6FC76071A2D1}" dt="2025-02-05T05:06:19.825" v="1624"/>
-          <ac:picMkLst>
-            <pc:docMk/>
-            <pc:sldMk cId="3314089761" sldId="627"/>
-            <ac:picMk id="4" creationId="{38C02200-2A20-B14C-F671-AD7DF15BE9E3}"/>
-          </ac:picMkLst>
-        </pc:picChg>
-      </pc:sldChg>
-      <pc:sldChg chg="addSp delSp modSp mod">
-        <pc:chgData name="Matthieu De Mari" userId="dfb708c9-d8dc-439f-9a3b-c772bf4a311c" providerId="ADAL" clId="{A43FC9A0-DA79-4390-BD87-6FC76071A2D1}" dt="2025-02-05T05:08:52.160" v="1982" actId="14100"/>
-        <pc:sldMkLst>
-          <pc:docMk/>
-          <pc:sldMk cId="145938198" sldId="630"/>
-        </pc:sldMkLst>
-        <pc:spChg chg="mod">
-          <ac:chgData name="Matthieu De Mari" userId="dfb708c9-d8dc-439f-9a3b-c772bf4a311c" providerId="ADAL" clId="{A43FC9A0-DA79-4390-BD87-6FC76071A2D1}" dt="2025-02-05T05:07:58.381" v="1853" actId="20577"/>
-          <ac:spMkLst>
-            <pc:docMk/>
-            <pc:sldMk cId="145938198" sldId="630"/>
-            <ac:spMk id="3" creationId="{18F81686-D0E3-4F7E-9DF0-29DC137713E7}"/>
-          </ac:spMkLst>
-        </pc:spChg>
-        <pc:spChg chg="add mod">
-          <ac:chgData name="Matthieu De Mari" userId="dfb708c9-d8dc-439f-9a3b-c772bf4a311c" providerId="ADAL" clId="{A43FC9A0-DA79-4390-BD87-6FC76071A2D1}" dt="2025-02-05T05:08:52.160" v="1982" actId="14100"/>
-          <ac:spMkLst>
-            <pc:docMk/>
-            <pc:sldMk cId="145938198" sldId="630"/>
-            <ac:spMk id="5" creationId="{481272D0-E25D-38E0-011C-C9EB10F6043F}"/>
-          </ac:spMkLst>
-        </pc:spChg>
-      </pc:sldChg>
-      <pc:sldChg chg="addSp delSp modSp mod">
-        <pc:chgData name="Matthieu De Mari" userId="dfb708c9-d8dc-439f-9a3b-c772bf4a311c" providerId="ADAL" clId="{A43FC9A0-DA79-4390-BD87-6FC76071A2D1}" dt="2025-01-25T13:51:36.219" v="5" actId="171"/>
-        <pc:sldMkLst>
-          <pc:docMk/>
-          <pc:sldMk cId="2282127814" sldId="632"/>
-        </pc:sldMkLst>
-        <pc:picChg chg="add mod ord">
-          <ac:chgData name="Matthieu De Mari" userId="dfb708c9-d8dc-439f-9a3b-c772bf4a311c" providerId="ADAL" clId="{A43FC9A0-DA79-4390-BD87-6FC76071A2D1}" dt="2025-01-25T13:51:36.219" v="5" actId="171"/>
-          <ac:picMkLst>
-            <pc:docMk/>
-            <pc:sldMk cId="2282127814" sldId="632"/>
-            <ac:picMk id="7" creationId="{1A048EE4-B4AD-ABE5-ACE3-C64AA464AB94}"/>
-          </ac:picMkLst>
-        </pc:picChg>
-      </pc:sldChg>
-      <pc:sldChg chg="del">
-        <pc:chgData name="Matthieu De Mari" userId="dfb708c9-d8dc-439f-9a3b-c772bf4a311c" providerId="ADAL" clId="{A43FC9A0-DA79-4390-BD87-6FC76071A2D1}" dt="2025-02-05T05:09:56.002" v="1989" actId="47"/>
-        <pc:sldMkLst>
-          <pc:docMk/>
-          <pc:sldMk cId="767657182" sldId="636"/>
-        </pc:sldMkLst>
-      </pc:sldChg>
-      <pc:sldChg chg="del">
-        <pc:chgData name="Matthieu De Mari" userId="dfb708c9-d8dc-439f-9a3b-c772bf4a311c" providerId="ADAL" clId="{A43FC9A0-DA79-4390-BD87-6FC76071A2D1}" dt="2025-02-05T05:09:54.409" v="1988" actId="47"/>
-        <pc:sldMkLst>
-          <pc:docMk/>
-          <pc:sldMk cId="2599086613" sldId="638"/>
-        </pc:sldMkLst>
-      </pc:sldChg>
-      <pc:sldChg chg="del">
-        <pc:chgData name="Matthieu De Mari" userId="dfb708c9-d8dc-439f-9a3b-c772bf4a311c" providerId="ADAL" clId="{A43FC9A0-DA79-4390-BD87-6FC76071A2D1}" dt="2025-02-05T05:09:44.356" v="1986" actId="47"/>
-        <pc:sldMkLst>
-          <pc:docMk/>
-          <pc:sldMk cId="967026721" sldId="641"/>
-        </pc:sldMkLst>
-      </pc:sldChg>
-      <pc:sldChg chg="del">
-        <pc:chgData name="Matthieu De Mari" userId="dfb708c9-d8dc-439f-9a3b-c772bf4a311c" providerId="ADAL" clId="{A43FC9A0-DA79-4390-BD87-6FC76071A2D1}" dt="2025-02-05T05:09:44.356" v="1986" actId="47"/>
-        <pc:sldMkLst>
-          <pc:docMk/>
-          <pc:sldMk cId="1277121450" sldId="642"/>
-        </pc:sldMkLst>
-      </pc:sldChg>
-      <pc:sldChg chg="del">
-        <pc:chgData name="Matthieu De Mari" userId="dfb708c9-d8dc-439f-9a3b-c772bf4a311c" providerId="ADAL" clId="{A43FC9A0-DA79-4390-BD87-6FC76071A2D1}" dt="2025-02-05T05:09:44.356" v="1986" actId="47"/>
-        <pc:sldMkLst>
-          <pc:docMk/>
-          <pc:sldMk cId="217772614" sldId="643"/>
-        </pc:sldMkLst>
-      </pc:sldChg>
-      <pc:sldChg chg="del">
-        <pc:chgData name="Matthieu De Mari" userId="dfb708c9-d8dc-439f-9a3b-c772bf4a311c" providerId="ADAL" clId="{A43FC9A0-DA79-4390-BD87-6FC76071A2D1}" dt="2025-02-05T05:09:44.356" v="1986" actId="47"/>
-        <pc:sldMkLst>
-          <pc:docMk/>
-          <pc:sldMk cId="2381005527" sldId="645"/>
-        </pc:sldMkLst>
-      </pc:sldChg>
-      <pc:sldChg chg="del">
-        <pc:chgData name="Matthieu De Mari" userId="dfb708c9-d8dc-439f-9a3b-c772bf4a311c" providerId="ADAL" clId="{A43FC9A0-DA79-4390-BD87-6FC76071A2D1}" dt="2025-02-05T05:09:44.356" v="1986" actId="47"/>
-        <pc:sldMkLst>
-          <pc:docMk/>
-          <pc:sldMk cId="1233052627" sldId="649"/>
-        </pc:sldMkLst>
-      </pc:sldChg>
-      <pc:sldChg chg="del">
-        <pc:chgData name="Matthieu De Mari" userId="dfb708c9-d8dc-439f-9a3b-c772bf4a311c" providerId="ADAL" clId="{A43FC9A0-DA79-4390-BD87-6FC76071A2D1}" dt="2025-02-05T05:09:44.356" v="1986" actId="47"/>
-        <pc:sldMkLst>
-          <pc:docMk/>
-          <pc:sldMk cId="304827989" sldId="650"/>
-        </pc:sldMkLst>
-      </pc:sldChg>
-      <pc:sldChg chg="del">
-        <pc:chgData name="Matthieu De Mari" userId="dfb708c9-d8dc-439f-9a3b-c772bf4a311c" providerId="ADAL" clId="{A43FC9A0-DA79-4390-BD87-6FC76071A2D1}" dt="2025-02-05T05:09:44.356" v="1986" actId="47"/>
-        <pc:sldMkLst>
-          <pc:docMk/>
-          <pc:sldMk cId="3717161183" sldId="651"/>
-        </pc:sldMkLst>
-      </pc:sldChg>
-      <pc:sldChg chg="del">
-        <pc:chgData name="Matthieu De Mari" userId="dfb708c9-d8dc-439f-9a3b-c772bf4a311c" providerId="ADAL" clId="{A43FC9A0-DA79-4390-BD87-6FC76071A2D1}" dt="2025-02-05T05:09:44.356" v="1986" actId="47"/>
-        <pc:sldMkLst>
-          <pc:docMk/>
-          <pc:sldMk cId="3643453173" sldId="652"/>
-        </pc:sldMkLst>
-      </pc:sldChg>
-      <pc:sldChg chg="del">
-        <pc:chgData name="Matthieu De Mari" userId="dfb708c9-d8dc-439f-9a3b-c772bf4a311c" providerId="ADAL" clId="{A43FC9A0-DA79-4390-BD87-6FC76071A2D1}" dt="2025-02-05T05:09:44.356" v="1986" actId="47"/>
-        <pc:sldMkLst>
-          <pc:docMk/>
-          <pc:sldMk cId="629423183" sldId="654"/>
-        </pc:sldMkLst>
-      </pc:sldChg>
-      <pc:sldChg chg="del">
-        <pc:chgData name="Matthieu De Mari" userId="dfb708c9-d8dc-439f-9a3b-c772bf4a311c" providerId="ADAL" clId="{A43FC9A0-DA79-4390-BD87-6FC76071A2D1}" dt="2025-02-05T05:09:44.356" v="1986" actId="47"/>
-        <pc:sldMkLst>
-          <pc:docMk/>
-          <pc:sldMk cId="1981122513" sldId="655"/>
-        </pc:sldMkLst>
-      </pc:sldChg>
-      <pc:sldChg chg="del">
-        <pc:chgData name="Matthieu De Mari" userId="dfb708c9-d8dc-439f-9a3b-c772bf4a311c" providerId="ADAL" clId="{A43FC9A0-DA79-4390-BD87-6FC76071A2D1}" dt="2025-02-05T05:09:44.356" v="1986" actId="47"/>
-        <pc:sldMkLst>
-          <pc:docMk/>
-          <pc:sldMk cId="1572258975" sldId="656"/>
-        </pc:sldMkLst>
-      </pc:sldChg>
-      <pc:sldChg chg="del">
-        <pc:chgData name="Matthieu De Mari" userId="dfb708c9-d8dc-439f-9a3b-c772bf4a311c" providerId="ADAL" clId="{A43FC9A0-DA79-4390-BD87-6FC76071A2D1}" dt="2025-02-05T05:09:44.356" v="1986" actId="47"/>
-        <pc:sldMkLst>
-          <pc:docMk/>
-          <pc:sldMk cId="3624671359" sldId="658"/>
-        </pc:sldMkLst>
-      </pc:sldChg>
-      <pc:sldChg chg="del">
-        <pc:chgData name="Matthieu De Mari" userId="dfb708c9-d8dc-439f-9a3b-c772bf4a311c" providerId="ADAL" clId="{A43FC9A0-DA79-4390-BD87-6FC76071A2D1}" dt="2025-02-05T05:09:44.356" v="1986" actId="47"/>
-        <pc:sldMkLst>
-          <pc:docMk/>
-          <pc:sldMk cId="383223004" sldId="661"/>
-        </pc:sldMkLst>
-      </pc:sldChg>
-      <pc:sldChg chg="del">
-        <pc:chgData name="Matthieu De Mari" userId="dfb708c9-d8dc-439f-9a3b-c772bf4a311c" providerId="ADAL" clId="{A43FC9A0-DA79-4390-BD87-6FC76071A2D1}" dt="2025-02-05T05:09:44.356" v="1986" actId="47"/>
-        <pc:sldMkLst>
-          <pc:docMk/>
-          <pc:sldMk cId="3035315714" sldId="663"/>
-        </pc:sldMkLst>
-      </pc:sldChg>
-      <pc:sldChg chg="del">
-        <pc:chgData name="Matthieu De Mari" userId="dfb708c9-d8dc-439f-9a3b-c772bf4a311c" providerId="ADAL" clId="{A43FC9A0-DA79-4390-BD87-6FC76071A2D1}" dt="2025-02-05T05:09:44.356" v="1986" actId="47"/>
-        <pc:sldMkLst>
-          <pc:docMk/>
-          <pc:sldMk cId="3559974155" sldId="664"/>
-        </pc:sldMkLst>
-      </pc:sldChg>
-      <pc:sldChg chg="del">
-        <pc:chgData name="Matthieu De Mari" userId="dfb708c9-d8dc-439f-9a3b-c772bf4a311c" providerId="ADAL" clId="{A43FC9A0-DA79-4390-BD87-6FC76071A2D1}" dt="2025-02-05T05:09:44.356" v="1986" actId="47"/>
-        <pc:sldMkLst>
-          <pc:docMk/>
-          <pc:sldMk cId="2645681835" sldId="665"/>
-        </pc:sldMkLst>
-      </pc:sldChg>
-      <pc:sldChg chg="del">
-        <pc:chgData name="Matthieu De Mari" userId="dfb708c9-d8dc-439f-9a3b-c772bf4a311c" providerId="ADAL" clId="{A43FC9A0-DA79-4390-BD87-6FC76071A2D1}" dt="2025-02-05T05:09:44.356" v="1986" actId="47"/>
-        <pc:sldMkLst>
-          <pc:docMk/>
-          <pc:sldMk cId="3576498149" sldId="666"/>
-        </pc:sldMkLst>
-      </pc:sldChg>
-      <pc:sldChg chg="del">
-        <pc:chgData name="Matthieu De Mari" userId="dfb708c9-d8dc-439f-9a3b-c772bf4a311c" providerId="ADAL" clId="{A43FC9A0-DA79-4390-BD87-6FC76071A2D1}" dt="2025-02-05T05:09:44.356" v="1986" actId="47"/>
-        <pc:sldMkLst>
-          <pc:docMk/>
-          <pc:sldMk cId="2448132734" sldId="667"/>
-        </pc:sldMkLst>
-      </pc:sldChg>
-      <pc:sldChg chg="del">
-        <pc:chgData name="Matthieu De Mari" userId="dfb708c9-d8dc-439f-9a3b-c772bf4a311c" providerId="ADAL" clId="{A43FC9A0-DA79-4390-BD87-6FC76071A2D1}" dt="2025-02-05T05:09:44.356" v="1986" actId="47"/>
-        <pc:sldMkLst>
-          <pc:docMk/>
-          <pc:sldMk cId="1294159851" sldId="668"/>
-        </pc:sldMkLst>
-      </pc:sldChg>
-      <pc:sldChg chg="del">
-        <pc:chgData name="Matthieu De Mari" userId="dfb708c9-d8dc-439f-9a3b-c772bf4a311c" providerId="ADAL" clId="{A43FC9A0-DA79-4390-BD87-6FC76071A2D1}" dt="2025-02-05T05:09:45.949" v="1987" actId="47"/>
-        <pc:sldMkLst>
-          <pc:docMk/>
-          <pc:sldMk cId="278028184" sldId="671"/>
-        </pc:sldMkLst>
-      </pc:sldChg>
-      <pc:sldChg chg="del">
-        <pc:chgData name="Matthieu De Mari" userId="dfb708c9-d8dc-439f-9a3b-c772bf4a311c" providerId="ADAL" clId="{A43FC9A0-DA79-4390-BD87-6FC76071A2D1}" dt="2025-02-05T05:09:45.949" v="1987" actId="47"/>
-        <pc:sldMkLst>
-          <pc:docMk/>
-          <pc:sldMk cId="4015266761" sldId="673"/>
-        </pc:sldMkLst>
-      </pc:sldChg>
-      <pc:sldChg chg="del">
-        <pc:chgData name="Matthieu De Mari" userId="dfb708c9-d8dc-439f-9a3b-c772bf4a311c" providerId="ADAL" clId="{A43FC9A0-DA79-4390-BD87-6FC76071A2D1}" dt="2025-02-05T05:09:45.949" v="1987" actId="47"/>
-        <pc:sldMkLst>
-          <pc:docMk/>
-          <pc:sldMk cId="4136466441" sldId="674"/>
-        </pc:sldMkLst>
-      </pc:sldChg>
-      <pc:sldChg chg="del">
-        <pc:chgData name="Matthieu De Mari" userId="dfb708c9-d8dc-439f-9a3b-c772bf4a311c" providerId="ADAL" clId="{A43FC9A0-DA79-4390-BD87-6FC76071A2D1}" dt="2025-02-05T05:09:54.409" v="1988" actId="47"/>
-        <pc:sldMkLst>
-          <pc:docMk/>
-          <pc:sldMk cId="3985725824" sldId="677"/>
-        </pc:sldMkLst>
-      </pc:sldChg>
-      <pc:sldChg chg="del">
-        <pc:chgData name="Matthieu De Mari" userId="dfb708c9-d8dc-439f-9a3b-c772bf4a311c" providerId="ADAL" clId="{A43FC9A0-DA79-4390-BD87-6FC76071A2D1}" dt="2025-02-05T05:09:56.002" v="1989" actId="47"/>
-        <pc:sldMkLst>
-          <pc:docMk/>
-          <pc:sldMk cId="2758040485" sldId="678"/>
-        </pc:sldMkLst>
-      </pc:sldChg>
-      <pc:sldChg chg="del">
-        <pc:chgData name="Matthieu De Mari" userId="dfb708c9-d8dc-439f-9a3b-c772bf4a311c" providerId="ADAL" clId="{A43FC9A0-DA79-4390-BD87-6FC76071A2D1}" dt="2025-02-05T05:09:56.002" v="1989" actId="47"/>
-        <pc:sldMkLst>
-          <pc:docMk/>
-          <pc:sldMk cId="2017719165" sldId="679"/>
-        </pc:sldMkLst>
-      </pc:sldChg>
-      <pc:sldChg chg="del">
-        <pc:chgData name="Matthieu De Mari" userId="dfb708c9-d8dc-439f-9a3b-c772bf4a311c" providerId="ADAL" clId="{A43FC9A0-DA79-4390-BD87-6FC76071A2D1}" dt="2025-02-05T05:09:56.002" v="1989" actId="47"/>
-        <pc:sldMkLst>
-          <pc:docMk/>
-          <pc:sldMk cId="1295920255" sldId="680"/>
-        </pc:sldMkLst>
-      </pc:sldChg>
-      <pc:sldChg chg="del">
-        <pc:chgData name="Matthieu De Mari" userId="dfb708c9-d8dc-439f-9a3b-c772bf4a311c" providerId="ADAL" clId="{A43FC9A0-DA79-4390-BD87-6FC76071A2D1}" dt="2025-02-05T05:09:45.949" v="1987" actId="47"/>
-        <pc:sldMkLst>
-          <pc:docMk/>
-          <pc:sldMk cId="55272946" sldId="681"/>
-        </pc:sldMkLst>
-      </pc:sldChg>
-      <pc:sldChg chg="modSp">
-        <pc:chgData name="Matthieu De Mari" userId="dfb708c9-d8dc-439f-9a3b-c772bf4a311c" providerId="ADAL" clId="{A43FC9A0-DA79-4390-BD87-6FC76071A2D1}" dt="2025-02-05T05:02:51.211" v="1432" actId="20577"/>
-        <pc:sldMkLst>
-          <pc:docMk/>
-          <pc:sldMk cId="3971470198" sldId="685"/>
-        </pc:sldMkLst>
-        <pc:spChg chg="mod">
-          <ac:chgData name="Matthieu De Mari" userId="dfb708c9-d8dc-439f-9a3b-c772bf4a311c" providerId="ADAL" clId="{A43FC9A0-DA79-4390-BD87-6FC76071A2D1}" dt="2025-02-05T05:02:51.211" v="1432" actId="20577"/>
-          <ac:spMkLst>
-            <pc:docMk/>
-            <pc:sldMk cId="3971470198" sldId="685"/>
-            <ac:spMk id="3" creationId="{B6B1E547-86BB-4723-80F3-6238130DC1D5}"/>
-          </ac:spMkLst>
-        </pc:spChg>
-      </pc:sldChg>
-      <pc:sldChg chg="modSp">
-        <pc:chgData name="Matthieu De Mari" userId="dfb708c9-d8dc-439f-9a3b-c772bf4a311c" providerId="ADAL" clId="{A43FC9A0-DA79-4390-BD87-6FC76071A2D1}" dt="2025-02-05T05:02:57.919" v="1433" actId="20577"/>
-        <pc:sldMkLst>
-          <pc:docMk/>
-          <pc:sldMk cId="1636593891" sldId="686"/>
-        </pc:sldMkLst>
-        <pc:spChg chg="mod">
-          <ac:chgData name="Matthieu De Mari" userId="dfb708c9-d8dc-439f-9a3b-c772bf4a311c" providerId="ADAL" clId="{A43FC9A0-DA79-4390-BD87-6FC76071A2D1}" dt="2025-02-05T05:02:57.919" v="1433" actId="20577"/>
-          <ac:spMkLst>
-            <pc:docMk/>
-            <pc:sldMk cId="1636593891" sldId="686"/>
-            <ac:spMk id="3" creationId="{B6B1E547-86BB-4723-80F3-6238130DC1D5}"/>
-          </ac:spMkLst>
-        </pc:spChg>
-      </pc:sldChg>
-      <pc:sldChg chg="modSp">
-        <pc:chgData name="Matthieu De Mari" userId="dfb708c9-d8dc-439f-9a3b-c772bf4a311c" providerId="ADAL" clId="{A43FC9A0-DA79-4390-BD87-6FC76071A2D1}" dt="2025-02-05T05:03:18.530" v="1434" actId="20577"/>
-        <pc:sldMkLst>
-          <pc:docMk/>
-          <pc:sldMk cId="1208186261" sldId="687"/>
-        </pc:sldMkLst>
-        <pc:spChg chg="mod">
-          <ac:chgData name="Matthieu De Mari" userId="dfb708c9-d8dc-439f-9a3b-c772bf4a311c" providerId="ADAL" clId="{A43FC9A0-DA79-4390-BD87-6FC76071A2D1}" dt="2025-02-05T05:03:18.530" v="1434" actId="20577"/>
-          <ac:spMkLst>
-            <pc:docMk/>
-            <pc:sldMk cId="1208186261" sldId="687"/>
-            <ac:spMk id="3" creationId="{D93E1973-8299-4953-A95B-1FF434A37CE5}"/>
-          </ac:spMkLst>
-        </pc:spChg>
-      </pc:sldChg>
-      <pc:sldChg chg="modSp mod">
-        <pc:chgData name="Matthieu De Mari" userId="dfb708c9-d8dc-439f-9a3b-c772bf4a311c" providerId="ADAL" clId="{A43FC9A0-DA79-4390-BD87-6FC76071A2D1}" dt="2025-02-05T05:03:54.529" v="1483" actId="207"/>
-        <pc:sldMkLst>
-          <pc:docMk/>
-          <pc:sldMk cId="1710811837" sldId="688"/>
-        </pc:sldMkLst>
-        <pc:spChg chg="mod">
-          <ac:chgData name="Matthieu De Mari" userId="dfb708c9-d8dc-439f-9a3b-c772bf4a311c" providerId="ADAL" clId="{A43FC9A0-DA79-4390-BD87-6FC76071A2D1}" dt="2025-02-05T05:03:54.529" v="1483" actId="207"/>
-          <ac:spMkLst>
-            <pc:docMk/>
-            <pc:sldMk cId="1710811837" sldId="688"/>
-            <ac:spMk id="3" creationId="{D93E1973-8299-4953-A95B-1FF434A37CE5}"/>
-          </ac:spMkLst>
-        </pc:spChg>
-      </pc:sldChg>
-      <pc:sldChg chg="modSp mod">
-        <pc:chgData name="Matthieu De Mari" userId="dfb708c9-d8dc-439f-9a3b-c772bf4a311c" providerId="ADAL" clId="{A43FC9A0-DA79-4390-BD87-6FC76071A2D1}" dt="2025-02-05T05:21:11.289" v="2572" actId="20577"/>
-        <pc:sldMkLst>
-          <pc:docMk/>
-          <pc:sldMk cId="3030094806" sldId="689"/>
-        </pc:sldMkLst>
-        <pc:spChg chg="mod">
-          <ac:chgData name="Matthieu De Mari" userId="dfb708c9-d8dc-439f-9a3b-c772bf4a311c" providerId="ADAL" clId="{A43FC9A0-DA79-4390-BD87-6FC76071A2D1}" dt="2025-02-05T05:21:07.351" v="2570" actId="20577"/>
-          <ac:spMkLst>
-            <pc:docMk/>
-            <pc:sldMk cId="3030094806" sldId="689"/>
-            <ac:spMk id="2" creationId="{4C5A6C23-8B45-4EFF-A88B-FF857D0DB06F}"/>
-          </ac:spMkLst>
-        </pc:spChg>
-        <pc:spChg chg="mod">
-          <ac:chgData name="Matthieu De Mari" userId="dfb708c9-d8dc-439f-9a3b-c772bf4a311c" providerId="ADAL" clId="{A43FC9A0-DA79-4390-BD87-6FC76071A2D1}" dt="2025-02-05T05:21:11.289" v="2572" actId="20577"/>
-          <ac:spMkLst>
-            <pc:docMk/>
-            <pc:sldMk cId="3030094806" sldId="689"/>
-            <ac:spMk id="3" creationId="{D93E1973-8299-4953-A95B-1FF434A37CE5}"/>
-          </ac:spMkLst>
-        </pc:spChg>
-      </pc:sldChg>
-      <pc:sldChg chg="del">
-        <pc:chgData name="Matthieu De Mari" userId="dfb708c9-d8dc-439f-9a3b-c772bf4a311c" providerId="ADAL" clId="{A43FC9A0-DA79-4390-BD87-6FC76071A2D1}" dt="2025-02-05T05:10:12.919" v="1992" actId="47"/>
-        <pc:sldMkLst>
-          <pc:docMk/>
-          <pc:sldMk cId="164195856" sldId="692"/>
-        </pc:sldMkLst>
-      </pc:sldChg>
-      <pc:sldChg chg="del">
-        <pc:chgData name="Matthieu De Mari" userId="dfb708c9-d8dc-439f-9a3b-c772bf4a311c" providerId="ADAL" clId="{A43FC9A0-DA79-4390-BD87-6FC76071A2D1}" dt="2025-02-05T05:09:44.356" v="1986" actId="47"/>
-        <pc:sldMkLst>
-          <pc:docMk/>
-          <pc:sldMk cId="260732904" sldId="694"/>
-        </pc:sldMkLst>
-      </pc:sldChg>
-      <pc:sldChg chg="del">
-        <pc:chgData name="Matthieu De Mari" userId="dfb708c9-d8dc-439f-9a3b-c772bf4a311c" providerId="ADAL" clId="{A43FC9A0-DA79-4390-BD87-6FC76071A2D1}" dt="2025-02-05T05:09:45.949" v="1987" actId="47"/>
-        <pc:sldMkLst>
-          <pc:docMk/>
-          <pc:sldMk cId="1184470419" sldId="695"/>
-        </pc:sldMkLst>
-      </pc:sldChg>
-      <pc:sldChg chg="del">
-        <pc:chgData name="Matthieu De Mari" userId="dfb708c9-d8dc-439f-9a3b-c772bf4a311c" providerId="ADAL" clId="{A43FC9A0-DA79-4390-BD87-6FC76071A2D1}" dt="2025-02-05T05:09:54.409" v="1988" actId="47"/>
-        <pc:sldMkLst>
-          <pc:docMk/>
-          <pc:sldMk cId="2333833429" sldId="696"/>
-        </pc:sldMkLst>
-      </pc:sldChg>
-      <pc:sldChg chg="modSp add mod">
-        <pc:chgData name="Matthieu De Mari" userId="dfb708c9-d8dc-439f-9a3b-c772bf4a311c" providerId="ADAL" clId="{A43FC9A0-DA79-4390-BD87-6FC76071A2D1}" dt="2025-02-05T04:55:46.140" v="1034" actId="14100"/>
-        <pc:sldMkLst>
-          <pc:docMk/>
-          <pc:sldMk cId="2952912205" sldId="697"/>
-        </pc:sldMkLst>
-        <pc:spChg chg="mod">
-          <ac:chgData name="Matthieu De Mari" userId="dfb708c9-d8dc-439f-9a3b-c772bf4a311c" providerId="ADAL" clId="{A43FC9A0-DA79-4390-BD87-6FC76071A2D1}" dt="2025-02-05T04:52:41.331" v="585" actId="20577"/>
-          <ac:spMkLst>
-            <pc:docMk/>
-            <pc:sldMk cId="2952912205" sldId="697"/>
-            <ac:spMk id="4" creationId="{7B612E9B-F049-2B88-C31F-74CD827E99AF}"/>
-          </ac:spMkLst>
-        </pc:spChg>
-        <pc:cxnChg chg="mod">
-          <ac:chgData name="Matthieu De Mari" userId="dfb708c9-d8dc-439f-9a3b-c772bf4a311c" providerId="ADAL" clId="{A43FC9A0-DA79-4390-BD87-6FC76071A2D1}" dt="2025-02-05T04:55:46.140" v="1034" actId="14100"/>
-          <ac:cxnSpMkLst>
-            <pc:docMk/>
-            <pc:sldMk cId="2952912205" sldId="697"/>
-            <ac:cxnSpMk id="5" creationId="{035CC734-DBF2-2255-4B88-87C2ED19398E}"/>
-          </ac:cxnSpMkLst>
-        </pc:cxnChg>
-      </pc:sldChg>
-      <pc:sldChg chg="modSp add mod">
-        <pc:chgData name="Matthieu De Mari" userId="dfb708c9-d8dc-439f-9a3b-c772bf4a311c" providerId="ADAL" clId="{A43FC9A0-DA79-4390-BD87-6FC76071A2D1}" dt="2025-02-05T04:54:44.778" v="959" actId="20577"/>
-        <pc:sldMkLst>
-          <pc:docMk/>
-          <pc:sldMk cId="3369403153" sldId="698"/>
-        </pc:sldMkLst>
-        <pc:spChg chg="mod">
-          <ac:chgData name="Matthieu De Mari" userId="dfb708c9-d8dc-439f-9a3b-c772bf4a311c" providerId="ADAL" clId="{A43FC9A0-DA79-4390-BD87-6FC76071A2D1}" dt="2025-02-05T04:54:44.778" v="959" actId="20577"/>
-          <ac:spMkLst>
-            <pc:docMk/>
-            <pc:sldMk cId="3369403153" sldId="698"/>
-            <ac:spMk id="4" creationId="{61059135-DCCF-693D-4A71-70CAC6C59C1F}"/>
-          </ac:spMkLst>
-        </pc:spChg>
-      </pc:sldChg>
-      <pc:sldChg chg="addSp delSp modSp new mod">
-        <pc:chgData name="Matthieu De Mari" userId="dfb708c9-d8dc-439f-9a3b-c772bf4a311c" providerId="ADAL" clId="{A43FC9A0-DA79-4390-BD87-6FC76071A2D1}" dt="2025-02-05T04:58:08.559" v="1265" actId="20577"/>
-        <pc:sldMkLst>
-          <pc:docMk/>
-          <pc:sldMk cId="577617240" sldId="699"/>
-        </pc:sldMkLst>
-        <pc:spChg chg="mod">
-          <ac:chgData name="Matthieu De Mari" userId="dfb708c9-d8dc-439f-9a3b-c772bf4a311c" providerId="ADAL" clId="{A43FC9A0-DA79-4390-BD87-6FC76071A2D1}" dt="2025-02-05T04:58:04.621" v="1263" actId="14100"/>
-          <ac:spMkLst>
-            <pc:docMk/>
-            <pc:sldMk cId="577617240" sldId="699"/>
-            <ac:spMk id="2" creationId="{74ABDBAF-53B6-9748-CA95-967FC806B1F9}"/>
-          </ac:spMkLst>
-        </pc:spChg>
-        <pc:spChg chg="mod">
-          <ac:chgData name="Matthieu De Mari" userId="dfb708c9-d8dc-439f-9a3b-c772bf4a311c" providerId="ADAL" clId="{A43FC9A0-DA79-4390-BD87-6FC76071A2D1}" dt="2025-02-05T04:58:08.559" v="1265" actId="20577"/>
-          <ac:spMkLst>
-            <pc:docMk/>
-            <pc:sldMk cId="577617240" sldId="699"/>
-            <ac:spMk id="3" creationId="{DCC78D61-B1D6-25B2-0E28-75BB56875C31}"/>
-          </ac:spMkLst>
-        </pc:spChg>
-        <pc:picChg chg="add mod">
-          <ac:chgData name="Matthieu De Mari" userId="dfb708c9-d8dc-439f-9a3b-c772bf4a311c" providerId="ADAL" clId="{A43FC9A0-DA79-4390-BD87-6FC76071A2D1}" dt="2025-02-05T04:58:00.780" v="1262" actId="1076"/>
-          <ac:picMkLst>
-            <pc:docMk/>
-            <pc:sldMk cId="577617240" sldId="699"/>
-            <ac:picMk id="6" creationId="{085C1FD1-E7AE-C97D-49B7-4DD406D4C0A0}"/>
-          </ac:picMkLst>
-        </pc:picChg>
-      </pc:sldChg>
-      <pc:sldChg chg="addSp delSp modSp add mod">
-        <pc:chgData name="Matthieu De Mari" userId="dfb708c9-d8dc-439f-9a3b-c772bf4a311c" providerId="ADAL" clId="{A43FC9A0-DA79-4390-BD87-6FC76071A2D1}" dt="2025-02-05T04:59:19.582" v="1270" actId="1076"/>
-        <pc:sldMkLst>
-          <pc:docMk/>
-          <pc:sldMk cId="1354855761" sldId="700"/>
-        </pc:sldMkLst>
-        <pc:picChg chg="add mod">
-          <ac:chgData name="Matthieu De Mari" userId="dfb708c9-d8dc-439f-9a3b-c772bf4a311c" providerId="ADAL" clId="{A43FC9A0-DA79-4390-BD87-6FC76071A2D1}" dt="2025-02-05T04:59:19.582" v="1270" actId="1076"/>
-          <ac:picMkLst>
-            <pc:docMk/>
-            <pc:sldMk cId="1354855761" sldId="700"/>
-            <ac:picMk id="5" creationId="{1A170F49-494C-64CB-30D1-2AE1B4455E15}"/>
-          </ac:picMkLst>
-        </pc:picChg>
-      </pc:sldChg>
-      <pc:sldChg chg="addSp delSp modSp add mod ord">
-        <pc:chgData name="Matthieu De Mari" userId="dfb708c9-d8dc-439f-9a3b-c772bf4a311c" providerId="ADAL" clId="{A43FC9A0-DA79-4390-BD87-6FC76071A2D1}" dt="2025-02-05T05:02:03.684" v="1415" actId="1076"/>
-        <pc:sldMkLst>
-          <pc:docMk/>
-          <pc:sldMk cId="1776743013" sldId="701"/>
-        </pc:sldMkLst>
-        <pc:spChg chg="mod">
-          <ac:chgData name="Matthieu De Mari" userId="dfb708c9-d8dc-439f-9a3b-c772bf4a311c" providerId="ADAL" clId="{A43FC9A0-DA79-4390-BD87-6FC76071A2D1}" dt="2025-02-05T05:01:32.044" v="1404" actId="20577"/>
-          <ac:spMkLst>
-            <pc:docMk/>
-            <pc:sldMk cId="1776743013" sldId="701"/>
-            <ac:spMk id="3" creationId="{C67A432A-A3B4-9BC0-DFBA-A7624917FE87}"/>
-          </ac:spMkLst>
-        </pc:spChg>
-        <pc:picChg chg="add mod">
-          <ac:chgData name="Matthieu De Mari" userId="dfb708c9-d8dc-439f-9a3b-c772bf4a311c" providerId="ADAL" clId="{A43FC9A0-DA79-4390-BD87-6FC76071A2D1}" dt="2025-02-05T05:02:03.684" v="1415" actId="1076"/>
-          <ac:picMkLst>
-            <pc:docMk/>
-            <pc:sldMk cId="1776743013" sldId="701"/>
-            <ac:picMk id="5" creationId="{FF9085A9-0492-642E-FC7B-59B775DD6625}"/>
-          </ac:picMkLst>
-        </pc:picChg>
-        <pc:picChg chg="add mod">
-          <ac:chgData name="Matthieu De Mari" userId="dfb708c9-d8dc-439f-9a3b-c772bf4a311c" providerId="ADAL" clId="{A43FC9A0-DA79-4390-BD87-6FC76071A2D1}" dt="2025-02-05T05:02:02.312" v="1414" actId="1076"/>
-          <ac:picMkLst>
-            <pc:docMk/>
-            <pc:sldMk cId="1776743013" sldId="701"/>
-            <ac:picMk id="8" creationId="{DF369D00-BBD1-18FC-410A-A73CD76E2A40}"/>
-          </ac:picMkLst>
-        </pc:picChg>
-      </pc:sldChg>
-      <pc:sldChg chg="addSp delSp modSp add mod">
-        <pc:chgData name="Matthieu De Mari" userId="dfb708c9-d8dc-439f-9a3b-c772bf4a311c" providerId="ADAL" clId="{A43FC9A0-DA79-4390-BD87-6FC76071A2D1}" dt="2025-02-05T05:01:40.670" v="1408" actId="1076"/>
-        <pc:sldMkLst>
-          <pc:docMk/>
-          <pc:sldMk cId="641657007" sldId="702"/>
-        </pc:sldMkLst>
-        <pc:picChg chg="add mod">
-          <ac:chgData name="Matthieu De Mari" userId="dfb708c9-d8dc-439f-9a3b-c772bf4a311c" providerId="ADAL" clId="{A43FC9A0-DA79-4390-BD87-6FC76071A2D1}" dt="2025-02-05T05:01:40.670" v="1408" actId="1076"/>
-          <ac:picMkLst>
-            <pc:docMk/>
-            <pc:sldMk cId="641657007" sldId="702"/>
-            <ac:picMk id="6" creationId="{C1202FF2-D765-5109-33DD-87836FC9B2B1}"/>
-          </ac:picMkLst>
-        </pc:picChg>
-      </pc:sldChg>
-      <pc:sldChg chg="addSp delSp modSp new mod">
-        <pc:chgData name="Matthieu De Mari" userId="dfb708c9-d8dc-439f-9a3b-c772bf4a311c" providerId="ADAL" clId="{A43FC9A0-DA79-4390-BD87-6FC76071A2D1}" dt="2025-02-05T05:30:02.746" v="3084" actId="14100"/>
-        <pc:sldMkLst>
-          <pc:docMk/>
-          <pc:sldMk cId="782325883" sldId="703"/>
-        </pc:sldMkLst>
-        <pc:spChg chg="mod">
-          <ac:chgData name="Matthieu De Mari" userId="dfb708c9-d8dc-439f-9a3b-c772bf4a311c" providerId="ADAL" clId="{A43FC9A0-DA79-4390-BD87-6FC76071A2D1}" dt="2025-02-05T05:23:18.890" v="2874" actId="20577"/>
-          <ac:spMkLst>
-            <pc:docMk/>
-            <pc:sldMk cId="782325883" sldId="703"/>
-            <ac:spMk id="2" creationId="{1213A799-D051-C40D-4886-212F3D976F16}"/>
-          </ac:spMkLst>
-        </pc:spChg>
-        <pc:spChg chg="mod">
-          <ac:chgData name="Matthieu De Mari" userId="dfb708c9-d8dc-439f-9a3b-c772bf4a311c" providerId="ADAL" clId="{A43FC9A0-DA79-4390-BD87-6FC76071A2D1}" dt="2025-02-05T05:24:04.189" v="2894" actId="27636"/>
-          <ac:spMkLst>
-            <pc:docMk/>
-            <pc:sldMk cId="782325883" sldId="703"/>
-            <ac:spMk id="3" creationId="{450A287C-9BB3-3655-5BD2-68722ADF241D}"/>
-          </ac:spMkLst>
-        </pc:spChg>
-        <pc:picChg chg="add mod">
-          <ac:chgData name="Matthieu De Mari" userId="dfb708c9-d8dc-439f-9a3b-c772bf4a311c" providerId="ADAL" clId="{A43FC9A0-DA79-4390-BD87-6FC76071A2D1}" dt="2025-02-05T05:30:02.746" v="3084" actId="14100"/>
-          <ac:picMkLst>
-            <pc:docMk/>
-            <pc:sldMk cId="782325883" sldId="703"/>
-            <ac:picMk id="8" creationId="{01E50443-4C07-EB90-FD70-559D1CCC7781}"/>
-          </ac:picMkLst>
-        </pc:picChg>
-      </pc:sldChg>
-      <pc:sldChg chg="modSp add mod">
-        <pc:chgData name="Matthieu De Mari" userId="dfb708c9-d8dc-439f-9a3b-c772bf4a311c" providerId="ADAL" clId="{A43FC9A0-DA79-4390-BD87-6FC76071A2D1}" dt="2025-02-05T05:20:59.866" v="2559"/>
-        <pc:sldMkLst>
-          <pc:docMk/>
-          <pc:sldMk cId="3494613890" sldId="704"/>
-        </pc:sldMkLst>
-        <pc:spChg chg="mod">
-          <ac:chgData name="Matthieu De Mari" userId="dfb708c9-d8dc-439f-9a3b-c772bf4a311c" providerId="ADAL" clId="{A43FC9A0-DA79-4390-BD87-6FC76071A2D1}" dt="2025-02-05T05:20:59.866" v="2559"/>
-          <ac:spMkLst>
-            <pc:docMk/>
-            <pc:sldMk cId="3494613890" sldId="704"/>
-            <ac:spMk id="2" creationId="{D916F715-41DA-81EE-D598-8C5B5B2B2467}"/>
-          </ac:spMkLst>
-        </pc:spChg>
-      </pc:sldChg>
-      <pc:sldChg chg="modSp add mod">
-        <pc:chgData name="Matthieu De Mari" userId="dfb708c9-d8dc-439f-9a3b-c772bf4a311c" providerId="ADAL" clId="{A43FC9A0-DA79-4390-BD87-6FC76071A2D1}" dt="2025-02-05T05:19:14.795" v="2412" actId="20577"/>
-        <pc:sldMkLst>
-          <pc:docMk/>
-          <pc:sldMk cId="3141222053" sldId="705"/>
-        </pc:sldMkLst>
-        <pc:spChg chg="mod">
-          <ac:chgData name="Matthieu De Mari" userId="dfb708c9-d8dc-439f-9a3b-c772bf4a311c" providerId="ADAL" clId="{A43FC9A0-DA79-4390-BD87-6FC76071A2D1}" dt="2025-02-05T05:19:13.609" v="2410"/>
-          <ac:spMkLst>
-            <pc:docMk/>
-            <pc:sldMk cId="3141222053" sldId="705"/>
-            <ac:spMk id="2" creationId="{9383A33B-9B4D-7905-767B-C7DD260EC564}"/>
-          </ac:spMkLst>
-        </pc:spChg>
-        <pc:spChg chg="mod">
-          <ac:chgData name="Matthieu De Mari" userId="dfb708c9-d8dc-439f-9a3b-c772bf4a311c" providerId="ADAL" clId="{A43FC9A0-DA79-4390-BD87-6FC76071A2D1}" dt="2025-02-05T05:19:14.795" v="2412" actId="20577"/>
-          <ac:spMkLst>
-            <pc:docMk/>
-            <pc:sldMk cId="3141222053" sldId="705"/>
-            <ac:spMk id="3" creationId="{26F687EF-1577-CF8B-15B5-008770D7A019}"/>
-          </ac:spMkLst>
-        </pc:spChg>
-      </pc:sldChg>
-      <pc:sldChg chg="modSp add mod">
-        <pc:chgData name="Matthieu De Mari" userId="dfb708c9-d8dc-439f-9a3b-c772bf4a311c" providerId="ADAL" clId="{A43FC9A0-DA79-4390-BD87-6FC76071A2D1}" dt="2025-02-05T05:19:39.432" v="2427" actId="27636"/>
-        <pc:sldMkLst>
-          <pc:docMk/>
-          <pc:sldMk cId="1397436905" sldId="706"/>
-        </pc:sldMkLst>
-        <pc:spChg chg="mod">
-          <ac:chgData name="Matthieu De Mari" userId="dfb708c9-d8dc-439f-9a3b-c772bf4a311c" providerId="ADAL" clId="{A43FC9A0-DA79-4390-BD87-6FC76071A2D1}" dt="2025-02-05T05:19:23.399" v="2417"/>
-          <ac:spMkLst>
-            <pc:docMk/>
-            <pc:sldMk cId="1397436905" sldId="706"/>
-            <ac:spMk id="2" creationId="{C447388A-C99A-CAE9-2673-D9E226A0D3C4}"/>
-          </ac:spMkLst>
-        </pc:spChg>
-        <pc:spChg chg="mod">
-          <ac:chgData name="Matthieu De Mari" userId="dfb708c9-d8dc-439f-9a3b-c772bf4a311c" providerId="ADAL" clId="{A43FC9A0-DA79-4390-BD87-6FC76071A2D1}" dt="2025-02-05T05:19:39.432" v="2427" actId="27636"/>
-          <ac:spMkLst>
-            <pc:docMk/>
-            <pc:sldMk cId="1397436905" sldId="706"/>
-            <ac:spMk id="3" creationId="{EC3A3FFB-E011-8262-55AD-05C7D13F6D49}"/>
-          </ac:spMkLst>
-        </pc:spChg>
-      </pc:sldChg>
-      <pc:sldChg chg="modSp add">
-        <pc:chgData name="Matthieu De Mari" userId="dfb708c9-d8dc-439f-9a3b-c772bf4a311c" providerId="ADAL" clId="{A43FC9A0-DA79-4390-BD87-6FC76071A2D1}" dt="2025-02-05T05:21:48.719" v="2575" actId="20577"/>
-        <pc:sldMkLst>
-          <pc:docMk/>
-          <pc:sldMk cId="3308373074" sldId="707"/>
-        </pc:sldMkLst>
-        <pc:spChg chg="mod">
-          <ac:chgData name="Matthieu De Mari" userId="dfb708c9-d8dc-439f-9a3b-c772bf4a311c" providerId="ADAL" clId="{A43FC9A0-DA79-4390-BD87-6FC76071A2D1}" dt="2025-02-05T05:21:48.719" v="2575" actId="20577"/>
-          <ac:spMkLst>
-            <pc:docMk/>
-            <pc:sldMk cId="3308373074" sldId="707"/>
-            <ac:spMk id="3" creationId="{75F2CAC6-ACD9-98A4-3C9F-A09547429913}"/>
-          </ac:spMkLst>
-        </pc:spChg>
-      </pc:sldChg>
-      <pc:sldChg chg="addSp delSp modSp add mod">
-        <pc:chgData name="Matthieu De Mari" userId="dfb708c9-d8dc-439f-9a3b-c772bf4a311c" providerId="ADAL" clId="{A43FC9A0-DA79-4390-BD87-6FC76071A2D1}" dt="2025-02-05T05:30:04.770" v="3085"/>
-        <pc:sldMkLst>
-          <pc:docMk/>
-          <pc:sldMk cId="455461829" sldId="708"/>
-        </pc:sldMkLst>
-        <pc:spChg chg="mod">
-          <ac:chgData name="Matthieu De Mari" userId="dfb708c9-d8dc-439f-9a3b-c772bf4a311c" providerId="ADAL" clId="{A43FC9A0-DA79-4390-BD87-6FC76071A2D1}" dt="2025-02-05T05:27:46.989" v="3010" actId="113"/>
-          <ac:spMkLst>
-            <pc:docMk/>
-            <pc:sldMk cId="455461829" sldId="708"/>
-            <ac:spMk id="3" creationId="{E1E23F8A-BE38-325F-4DB3-037FDADDA7FF}"/>
-          </ac:spMkLst>
-        </pc:spChg>
-        <pc:picChg chg="add mod">
-          <ac:chgData name="Matthieu De Mari" userId="dfb708c9-d8dc-439f-9a3b-c772bf4a311c" providerId="ADAL" clId="{A43FC9A0-DA79-4390-BD87-6FC76071A2D1}" dt="2025-02-05T05:30:04.770" v="3085"/>
-          <ac:picMkLst>
-            <pc:docMk/>
-            <pc:sldMk cId="455461829" sldId="708"/>
-            <ac:picMk id="7" creationId="{2E9A5D75-4D23-516A-336E-060D3AFEE86E}"/>
-          </ac:picMkLst>
-        </pc:picChg>
-      </pc:sldChg>
-      <pc:sldChg chg="addSp delSp modSp add mod">
-        <pc:chgData name="Matthieu De Mari" userId="dfb708c9-d8dc-439f-9a3b-c772bf4a311c" providerId="ADAL" clId="{A43FC9A0-DA79-4390-BD87-6FC76071A2D1}" dt="2025-02-05T05:30:07.730" v="3087"/>
-        <pc:sldMkLst>
-          <pc:docMk/>
-          <pc:sldMk cId="1885394846" sldId="709"/>
-        </pc:sldMkLst>
-        <pc:spChg chg="mod">
-          <ac:chgData name="Matthieu De Mari" userId="dfb708c9-d8dc-439f-9a3b-c772bf4a311c" providerId="ADAL" clId="{A43FC9A0-DA79-4390-BD87-6FC76071A2D1}" dt="2025-02-05T05:28:48.470" v="3046" actId="27636"/>
-          <ac:spMkLst>
-            <pc:docMk/>
-            <pc:sldMk cId="1885394846" sldId="709"/>
-            <ac:spMk id="3" creationId="{5ABBE95B-BBB3-CC6D-1585-4FAE7BA37BC5}"/>
-          </ac:spMkLst>
-        </pc:spChg>
-        <pc:picChg chg="add mod">
-          <ac:chgData name="Matthieu De Mari" userId="dfb708c9-d8dc-439f-9a3b-c772bf4a311c" providerId="ADAL" clId="{A43FC9A0-DA79-4390-BD87-6FC76071A2D1}" dt="2025-02-05T05:30:07.730" v="3087"/>
-          <ac:picMkLst>
-            <pc:docMk/>
-            <pc:sldMk cId="1885394846" sldId="709"/>
-            <ac:picMk id="5" creationId="{45ED50B2-19D9-7D88-631F-E77430E437B2}"/>
-          </ac:picMkLst>
-        </pc:picChg>
-      </pc:sldChg>
-      <pc:sldChg chg="addSp delSp modSp add mod">
-        <pc:chgData name="Matthieu De Mari" userId="dfb708c9-d8dc-439f-9a3b-c772bf4a311c" providerId="ADAL" clId="{A43FC9A0-DA79-4390-BD87-6FC76071A2D1}" dt="2025-02-05T05:30:25.251" v="3126" actId="27636"/>
-        <pc:sldMkLst>
-          <pc:docMk/>
-          <pc:sldMk cId="2317621515" sldId="710"/>
-        </pc:sldMkLst>
-        <pc:spChg chg="mod">
-          <ac:chgData name="Matthieu De Mari" userId="dfb708c9-d8dc-439f-9a3b-c772bf4a311c" providerId="ADAL" clId="{A43FC9A0-DA79-4390-BD87-6FC76071A2D1}" dt="2025-02-05T05:30:25.251" v="3126" actId="27636"/>
-          <ac:spMkLst>
-            <pc:docMk/>
-            <pc:sldMk cId="2317621515" sldId="710"/>
-            <ac:spMk id="3" creationId="{241E110E-85F1-3AF9-1795-3552EBC557E9}"/>
-          </ac:spMkLst>
-        </pc:spChg>
-        <pc:picChg chg="add mod">
-          <ac:chgData name="Matthieu De Mari" userId="dfb708c9-d8dc-439f-9a3b-c772bf4a311c" providerId="ADAL" clId="{A43FC9A0-DA79-4390-BD87-6FC76071A2D1}" dt="2025-02-05T05:30:21.646" v="3124"/>
-          <ac:picMkLst>
-            <pc:docMk/>
-            <pc:sldMk cId="2317621515" sldId="710"/>
-            <ac:picMk id="5" creationId="{666246A4-493F-42D0-3003-14583B5C9B7B}"/>
-          </ac:picMkLst>
-        </pc:picChg>
-      </pc:sldChg>
-      <pc:sldChg chg="addSp delSp modSp add mod">
-        <pc:chgData name="Matthieu De Mari" userId="dfb708c9-d8dc-439f-9a3b-c772bf4a311c" providerId="ADAL" clId="{A43FC9A0-DA79-4390-BD87-6FC76071A2D1}" dt="2025-02-05T05:34:27.163" v="3329" actId="20577"/>
-        <pc:sldMkLst>
-          <pc:docMk/>
-          <pc:sldMk cId="1986914679" sldId="711"/>
-        </pc:sldMkLst>
-        <pc:spChg chg="mod">
-          <ac:chgData name="Matthieu De Mari" userId="dfb708c9-d8dc-439f-9a3b-c772bf4a311c" providerId="ADAL" clId="{A43FC9A0-DA79-4390-BD87-6FC76071A2D1}" dt="2025-02-05T05:31:16.840" v="3147" actId="20577"/>
-          <ac:spMkLst>
-            <pc:docMk/>
-            <pc:sldMk cId="1986914679" sldId="711"/>
-            <ac:spMk id="2" creationId="{77083677-AF1D-D8B3-6398-77D70519B375}"/>
-          </ac:spMkLst>
-        </pc:spChg>
-        <pc:spChg chg="mod">
-          <ac:chgData name="Matthieu De Mari" userId="dfb708c9-d8dc-439f-9a3b-c772bf4a311c" providerId="ADAL" clId="{A43FC9A0-DA79-4390-BD87-6FC76071A2D1}" dt="2025-02-05T05:34:27.163" v="3329" actId="20577"/>
-          <ac:spMkLst>
-            <pc:docMk/>
-            <pc:sldMk cId="1986914679" sldId="711"/>
-            <ac:spMk id="3" creationId="{863655AB-AE1D-3331-7D50-5E0DD0EA6150}"/>
-          </ac:spMkLst>
-        </pc:spChg>
-        <pc:picChg chg="add mod">
-          <ac:chgData name="Matthieu De Mari" userId="dfb708c9-d8dc-439f-9a3b-c772bf4a311c" providerId="ADAL" clId="{A43FC9A0-DA79-4390-BD87-6FC76071A2D1}" dt="2025-02-05T05:31:10.347" v="3130" actId="1076"/>
-          <ac:picMkLst>
-            <pc:docMk/>
-            <pc:sldMk cId="1986914679" sldId="711"/>
-            <ac:picMk id="6" creationId="{7AF0C0E8-B197-8BCB-9E1B-80D0004A2A11}"/>
-          </ac:picMkLst>
-        </pc:picChg>
-        <pc:cxnChg chg="add mod">
-          <ac:chgData name="Matthieu De Mari" userId="dfb708c9-d8dc-439f-9a3b-c772bf4a311c" providerId="ADAL" clId="{A43FC9A0-DA79-4390-BD87-6FC76071A2D1}" dt="2025-02-05T05:33:41.247" v="3282" actId="1582"/>
-          <ac:cxnSpMkLst>
-            <pc:docMk/>
-            <pc:sldMk cId="1986914679" sldId="711"/>
-            <ac:cxnSpMk id="8" creationId="{D414008E-93AD-1CB1-315E-2AE7695136B5}"/>
-          </ac:cxnSpMkLst>
-        </pc:cxnChg>
-        <pc:cxnChg chg="add mod">
-          <ac:chgData name="Matthieu De Mari" userId="dfb708c9-d8dc-439f-9a3b-c772bf4a311c" providerId="ADAL" clId="{A43FC9A0-DA79-4390-BD87-6FC76071A2D1}" dt="2025-02-05T05:33:50.400" v="3285" actId="14100"/>
-          <ac:cxnSpMkLst>
-            <pc:docMk/>
-            <pc:sldMk cId="1986914679" sldId="711"/>
-            <ac:cxnSpMk id="12" creationId="{8535F94A-BA8B-B000-5E28-3765A8202794}"/>
-          </ac:cxnSpMkLst>
-        </pc:cxnChg>
-        <pc:cxnChg chg="add mod">
-          <ac:chgData name="Matthieu De Mari" userId="dfb708c9-d8dc-439f-9a3b-c772bf4a311c" providerId="ADAL" clId="{A43FC9A0-DA79-4390-BD87-6FC76071A2D1}" dt="2025-02-05T05:34:24.991" v="3327" actId="14100"/>
-          <ac:cxnSpMkLst>
-            <pc:docMk/>
-            <pc:sldMk cId="1986914679" sldId="711"/>
-            <ac:cxnSpMk id="15" creationId="{6C636339-921F-A6B7-EEB7-ACB3F8AA5285}"/>
-          </ac:cxnSpMkLst>
-        </pc:cxnChg>
-      </pc:sldChg>
-      <pc:sldChg chg="addSp modSp add mod">
-        <pc:chgData name="Matthieu De Mari" userId="dfb708c9-d8dc-439f-9a3b-c772bf4a311c" providerId="ADAL" clId="{A43FC9A0-DA79-4390-BD87-6FC76071A2D1}" dt="2025-02-05T05:35:33.680" v="3356" actId="6549"/>
-        <pc:sldMkLst>
-          <pc:docMk/>
-          <pc:sldMk cId="205147424" sldId="712"/>
-        </pc:sldMkLst>
-        <pc:spChg chg="mod">
-          <ac:chgData name="Matthieu De Mari" userId="dfb708c9-d8dc-439f-9a3b-c772bf4a311c" providerId="ADAL" clId="{A43FC9A0-DA79-4390-BD87-6FC76071A2D1}" dt="2025-02-05T05:35:33.680" v="3356" actId="6549"/>
-          <ac:spMkLst>
-            <pc:docMk/>
-            <pc:sldMk cId="205147424" sldId="712"/>
-            <ac:spMk id="3" creationId="{C6F12B9E-9EAD-2210-92AF-3ED3941F0507}"/>
-          </ac:spMkLst>
-        </pc:spChg>
-        <pc:cxnChg chg="add mod">
-          <ac:chgData name="Matthieu De Mari" userId="dfb708c9-d8dc-439f-9a3b-c772bf4a311c" providerId="ADAL" clId="{A43FC9A0-DA79-4390-BD87-6FC76071A2D1}" dt="2025-02-05T05:35:14.196" v="3351" actId="14100"/>
-          <ac:cxnSpMkLst>
-            <pc:docMk/>
-            <pc:sldMk cId="205147424" sldId="712"/>
-            <ac:cxnSpMk id="4" creationId="{871EB101-0C08-4944-5B13-70CB860EC8C7}"/>
-          </ac:cxnSpMkLst>
-        </pc:cxnChg>
-        <pc:cxnChg chg="add mod">
-          <ac:chgData name="Matthieu De Mari" userId="dfb708c9-d8dc-439f-9a3b-c772bf4a311c" providerId="ADAL" clId="{A43FC9A0-DA79-4390-BD87-6FC76071A2D1}" dt="2025-02-05T05:35:19.588" v="3352" actId="14100"/>
-          <ac:cxnSpMkLst>
-            <pc:docMk/>
-            <pc:sldMk cId="205147424" sldId="712"/>
-            <ac:cxnSpMk id="8" creationId="{CDBA9429-9237-6D1D-46C4-95FF18A004F3}"/>
-          </ac:cxnSpMkLst>
-        </pc:cxnChg>
-        <pc:cxnChg chg="add mod">
-          <ac:chgData name="Matthieu De Mari" userId="dfb708c9-d8dc-439f-9a3b-c772bf4a311c" providerId="ADAL" clId="{A43FC9A0-DA79-4390-BD87-6FC76071A2D1}" dt="2025-02-05T05:35:30.010" v="3355" actId="14100"/>
-          <ac:cxnSpMkLst>
-            <pc:docMk/>
-            <pc:sldMk cId="205147424" sldId="712"/>
-            <ac:cxnSpMk id="15" creationId="{8FE2AE47-7315-8FC1-8380-317436A21F3F}"/>
-          </ac:cxnSpMkLst>
-        </pc:cxnChg>
-      </pc:sldChg>
-      <pc:sldChg chg="addSp delSp modSp add mod">
-        <pc:chgData name="Matthieu De Mari" userId="dfb708c9-d8dc-439f-9a3b-c772bf4a311c" providerId="ADAL" clId="{A43FC9A0-DA79-4390-BD87-6FC76071A2D1}" dt="2025-02-05T05:41:35.171" v="4037" actId="1076"/>
-        <pc:sldMkLst>
-          <pc:docMk/>
-          <pc:sldMk cId="840766917" sldId="713"/>
-        </pc:sldMkLst>
-        <pc:spChg chg="mod">
-          <ac:chgData name="Matthieu De Mari" userId="dfb708c9-d8dc-439f-9a3b-c772bf4a311c" providerId="ADAL" clId="{A43FC9A0-DA79-4390-BD87-6FC76071A2D1}" dt="2025-02-05T05:38:34.711" v="3766" actId="20577"/>
-          <ac:spMkLst>
-            <pc:docMk/>
-            <pc:sldMk cId="840766917" sldId="713"/>
-            <ac:spMk id="3" creationId="{BCA5D6DA-17D6-FE48-F52F-BC1386631490}"/>
-          </ac:spMkLst>
-        </pc:spChg>
-        <pc:picChg chg="add mod modCrop">
-          <ac:chgData name="Matthieu De Mari" userId="dfb708c9-d8dc-439f-9a3b-c772bf4a311c" providerId="ADAL" clId="{A43FC9A0-DA79-4390-BD87-6FC76071A2D1}" dt="2025-02-05T05:41:23.498" v="4033" actId="1076"/>
-          <ac:picMkLst>
-            <pc:docMk/>
-            <pc:sldMk cId="840766917" sldId="713"/>
-            <ac:picMk id="5" creationId="{DC90C796-5D50-732B-F006-870D46E8DB60}"/>
-          </ac:picMkLst>
-        </pc:picChg>
-        <pc:picChg chg="add mod modCrop">
-          <ac:chgData name="Matthieu De Mari" userId="dfb708c9-d8dc-439f-9a3b-c772bf4a311c" providerId="ADAL" clId="{A43FC9A0-DA79-4390-BD87-6FC76071A2D1}" dt="2025-02-05T05:41:35.171" v="4037" actId="1076"/>
-          <ac:picMkLst>
-            <pc:docMk/>
-            <pc:sldMk cId="840766917" sldId="713"/>
-            <ac:picMk id="8" creationId="{BEC8DC0C-BFCD-F0BF-DAC7-0BCB0DC0145E}"/>
-          </ac:picMkLst>
-        </pc:picChg>
-      </pc:sldChg>
-      <pc:sldChg chg="addSp delSp modSp add mod">
-        <pc:chgData name="Matthieu De Mari" userId="dfb708c9-d8dc-439f-9a3b-c772bf4a311c" providerId="ADAL" clId="{A43FC9A0-DA79-4390-BD87-6FC76071A2D1}" dt="2025-02-05T05:37:22.090" v="3645" actId="14100"/>
-        <pc:sldMkLst>
-          <pc:docMk/>
-          <pc:sldMk cId="918999886" sldId="714"/>
-        </pc:sldMkLst>
-        <pc:spChg chg="mod">
-          <ac:chgData name="Matthieu De Mari" userId="dfb708c9-d8dc-439f-9a3b-c772bf4a311c" providerId="ADAL" clId="{A43FC9A0-DA79-4390-BD87-6FC76071A2D1}" dt="2025-02-05T05:37:17.213" v="3643" actId="20577"/>
-          <ac:spMkLst>
-            <pc:docMk/>
-            <pc:sldMk cId="918999886" sldId="714"/>
-            <ac:spMk id="3" creationId="{67A9CD64-A856-940B-58B0-8B3211C3D94C}"/>
-          </ac:spMkLst>
-        </pc:spChg>
-        <pc:cxnChg chg="mod">
-          <ac:chgData name="Matthieu De Mari" userId="dfb708c9-d8dc-439f-9a3b-c772bf4a311c" providerId="ADAL" clId="{A43FC9A0-DA79-4390-BD87-6FC76071A2D1}" dt="2025-02-05T05:36:24.115" v="3486" actId="14100"/>
-          <ac:cxnSpMkLst>
-            <pc:docMk/>
-            <pc:sldMk cId="918999886" sldId="714"/>
-            <ac:cxnSpMk id="4" creationId="{B6DFE986-E072-1D6F-F028-CFA913399ABE}"/>
-          </ac:cxnSpMkLst>
-        </pc:cxnChg>
-        <pc:cxnChg chg="mod">
-          <ac:chgData name="Matthieu De Mari" userId="dfb708c9-d8dc-439f-9a3b-c772bf4a311c" providerId="ADAL" clId="{A43FC9A0-DA79-4390-BD87-6FC76071A2D1}" dt="2025-02-05T05:37:12.237" v="3639" actId="14100"/>
-          <ac:cxnSpMkLst>
-            <pc:docMk/>
-            <pc:sldMk cId="918999886" sldId="714"/>
-            <ac:cxnSpMk id="8" creationId="{04395854-32B1-BFAB-F1D6-C52A3A98FA69}"/>
-          </ac:cxnSpMkLst>
-        </pc:cxnChg>
-        <pc:cxnChg chg="add mod">
-          <ac:chgData name="Matthieu De Mari" userId="dfb708c9-d8dc-439f-9a3b-c772bf4a311c" providerId="ADAL" clId="{A43FC9A0-DA79-4390-BD87-6FC76071A2D1}" dt="2025-02-05T05:37:22.090" v="3645" actId="14100"/>
-          <ac:cxnSpMkLst>
-            <pc:docMk/>
-            <pc:sldMk cId="918999886" sldId="714"/>
-            <ac:cxnSpMk id="13" creationId="{20AB0056-BEB7-6A24-AB8E-25969FE4420D}"/>
-          </ac:cxnSpMkLst>
-        </pc:cxnChg>
-      </pc:sldChg>
-      <pc:sldChg chg="addSp modSp add mod">
-        <pc:chgData name="Matthieu De Mari" userId="dfb708c9-d8dc-439f-9a3b-c772bf4a311c" providerId="ADAL" clId="{A43FC9A0-DA79-4390-BD87-6FC76071A2D1}" dt="2025-02-05T05:41:53.652" v="4040" actId="20577"/>
-        <pc:sldMkLst>
-          <pc:docMk/>
-          <pc:sldMk cId="1901145772" sldId="715"/>
-        </pc:sldMkLst>
-        <pc:spChg chg="mod">
-          <ac:chgData name="Matthieu De Mari" userId="dfb708c9-d8dc-439f-9a3b-c772bf4a311c" providerId="ADAL" clId="{A43FC9A0-DA79-4390-BD87-6FC76071A2D1}" dt="2025-02-05T05:41:53.652" v="4040" actId="20577"/>
-          <ac:spMkLst>
-            <pc:docMk/>
-            <pc:sldMk cId="1901145772" sldId="715"/>
-            <ac:spMk id="3" creationId="{819704A7-2F41-EF17-E7E6-E1BE1328C803}"/>
-          </ac:spMkLst>
-        </pc:spChg>
-        <pc:picChg chg="add mod">
-          <ac:chgData name="Matthieu De Mari" userId="dfb708c9-d8dc-439f-9a3b-c772bf4a311c" providerId="ADAL" clId="{A43FC9A0-DA79-4390-BD87-6FC76071A2D1}" dt="2025-02-05T05:41:42.047" v="4038"/>
-          <ac:picMkLst>
-            <pc:docMk/>
-            <pc:sldMk cId="1901145772" sldId="715"/>
-            <ac:picMk id="4" creationId="{FB43E7EF-DFF9-E7A6-39C8-66231B3C525C}"/>
-          </ac:picMkLst>
-        </pc:picChg>
-        <pc:picChg chg="add mod">
-          <ac:chgData name="Matthieu De Mari" userId="dfb708c9-d8dc-439f-9a3b-c772bf4a311c" providerId="ADAL" clId="{A43FC9A0-DA79-4390-BD87-6FC76071A2D1}" dt="2025-02-05T05:41:42.047" v="4038"/>
-          <ac:picMkLst>
-            <pc:docMk/>
-            <pc:sldMk cId="1901145772" sldId="715"/>
-            <ac:picMk id="5" creationId="{B0E0FC88-5744-75D6-2518-CCBDB8DA4F41}"/>
-          </ac:picMkLst>
-        </pc:picChg>
-      </pc:sldChg>
-      <pc:sldChg chg="addSp delSp modSp add mod">
-        <pc:chgData name="Matthieu De Mari" userId="dfb708c9-d8dc-439f-9a3b-c772bf4a311c" providerId="ADAL" clId="{A43FC9A0-DA79-4390-BD87-6FC76071A2D1}" dt="2025-02-05T05:42:14.043" v="4046" actId="1076"/>
-        <pc:sldMkLst>
-          <pc:docMk/>
-          <pc:sldMk cId="4227758544" sldId="716"/>
-        </pc:sldMkLst>
-        <pc:picChg chg="add mod">
-          <ac:chgData name="Matthieu De Mari" userId="dfb708c9-d8dc-439f-9a3b-c772bf4a311c" providerId="ADAL" clId="{A43FC9A0-DA79-4390-BD87-6FC76071A2D1}" dt="2025-02-05T05:42:14.043" v="4046" actId="1076"/>
-          <ac:picMkLst>
-            <pc:docMk/>
-            <pc:sldMk cId="4227758544" sldId="716"/>
-            <ac:picMk id="7" creationId="{C1FEF13E-389F-3CE1-5D9C-B64549548333}"/>
-          </ac:picMkLst>
-        </pc:picChg>
-      </pc:sldChg>
-      <pc:sldChg chg="addSp delSp modSp add mod">
-        <pc:chgData name="Matthieu De Mari" userId="dfb708c9-d8dc-439f-9a3b-c772bf4a311c" providerId="ADAL" clId="{A43FC9A0-DA79-4390-BD87-6FC76071A2D1}" dt="2025-02-05T05:43:42.668" v="4068"/>
-        <pc:sldMkLst>
-          <pc:docMk/>
-          <pc:sldMk cId="389079815" sldId="717"/>
-        </pc:sldMkLst>
-        <pc:spChg chg="mod">
-          <ac:chgData name="Matthieu De Mari" userId="dfb708c9-d8dc-439f-9a3b-c772bf4a311c" providerId="ADAL" clId="{A43FC9A0-DA79-4390-BD87-6FC76071A2D1}" dt="2025-02-05T05:42:55.945" v="4056" actId="27636"/>
-          <ac:spMkLst>
-            <pc:docMk/>
-            <pc:sldMk cId="389079815" sldId="717"/>
-            <ac:spMk id="3" creationId="{AA5D6F6B-8C8A-6A7C-D967-C3D509244FF7}"/>
-          </ac:spMkLst>
-        </pc:spChg>
-        <pc:spChg chg="add mod">
-          <ac:chgData name="Matthieu De Mari" userId="dfb708c9-d8dc-439f-9a3b-c772bf4a311c" providerId="ADAL" clId="{A43FC9A0-DA79-4390-BD87-6FC76071A2D1}" dt="2025-02-05T05:43:42.668" v="4068"/>
-          <ac:spMkLst>
-            <pc:docMk/>
-            <pc:sldMk cId="389079815" sldId="717"/>
-            <ac:spMk id="6" creationId="{7FBE8F59-B0B9-5FD6-BBBF-8D6919D4D167}"/>
-          </ac:spMkLst>
-        </pc:spChg>
-        <pc:picChg chg="add mod">
-          <ac:chgData name="Matthieu De Mari" userId="dfb708c9-d8dc-439f-9a3b-c772bf4a311c" providerId="ADAL" clId="{A43FC9A0-DA79-4390-BD87-6FC76071A2D1}" dt="2025-02-05T05:43:16.909" v="4064" actId="1076"/>
-          <ac:picMkLst>
-            <pc:docMk/>
-            <pc:sldMk cId="389079815" sldId="717"/>
-            <ac:picMk id="5" creationId="{7711B538-DC3D-B345-5269-B0D86C6AF511}"/>
-          </ac:picMkLst>
-        </pc:picChg>
-      </pc:sldChg>
-      <pc:sldChg chg="addSp delSp modSp add mod">
-        <pc:chgData name="Matthieu De Mari" userId="dfb708c9-d8dc-439f-9a3b-c772bf4a311c" providerId="ADAL" clId="{A43FC9A0-DA79-4390-BD87-6FC76071A2D1}" dt="2025-02-05T05:45:09.510" v="4120" actId="20577"/>
+        <pc:chgData name="Matthieu De Mari" userId="S::matthieu_demari@sutd.edu.sg::dfb708c9-d8dc-439f-9a3b-c772bf4a311c" providerId="AD" clId="Web-{7B5F526D-D128-424A-96BD-F26992A920DB}" dt="2026-02-24T09:22:52.933" v="0" actId="20577"/>
         <pc:sldMkLst>
           <pc:docMk/>
           <pc:sldMk cId="2412420179" sldId="718"/>
         </pc:sldMkLst>
         <pc:spChg chg="mod">
-          <ac:chgData name="Matthieu De Mari" userId="dfb708c9-d8dc-439f-9a3b-c772bf4a311c" providerId="ADAL" clId="{A43FC9A0-DA79-4390-BD87-6FC76071A2D1}" dt="2025-02-05T05:45:09.510" v="4120" actId="20577"/>
+          <ac:chgData name="Matthieu De Mari" userId="S::matthieu_demari@sutd.edu.sg::dfb708c9-d8dc-439f-9a3b-c772bf4a311c" providerId="AD" clId="Web-{7B5F526D-D128-424A-96BD-F26992A920DB}" dt="2026-02-24T09:22:52.933" v="0" actId="20577"/>
           <ac:spMkLst>
             <pc:docMk/>
             <pc:sldMk cId="2412420179" sldId="718"/>
             <ac:spMk id="3" creationId="{9AD06020-1488-173C-8D2C-FFE17366A22A}"/>
           </ac:spMkLst>
         </pc:spChg>
-        <pc:spChg chg="add mod">
-          <ac:chgData name="Matthieu De Mari" userId="dfb708c9-d8dc-439f-9a3b-c772bf4a311c" providerId="ADAL" clId="{A43FC9A0-DA79-4390-BD87-6FC76071A2D1}" dt="2025-02-05T05:44:21.509" v="4078" actId="208"/>
-          <ac:spMkLst>
-            <pc:docMk/>
-            <pc:sldMk cId="2412420179" sldId="718"/>
-            <ac:spMk id="5" creationId="{A97F6618-C47B-87E7-35D0-03627950FCB4}"/>
-          </ac:spMkLst>
-        </pc:spChg>
-        <pc:picChg chg="add mod">
-          <ac:chgData name="Matthieu De Mari" userId="dfb708c9-d8dc-439f-9a3b-c772bf4a311c" providerId="ADAL" clId="{A43FC9A0-DA79-4390-BD87-6FC76071A2D1}" dt="2025-02-05T05:43:18.486" v="4065"/>
-          <ac:picMkLst>
-            <pc:docMk/>
-            <pc:sldMk cId="2412420179" sldId="718"/>
-            <ac:picMk id="4" creationId="{52D129D1-3808-FAA6-2485-FA0D2570C32E}"/>
-          </ac:picMkLst>
-        </pc:picChg>
-      </pc:sldChg>
-      <pc:sldChg chg="addSp delSp modSp add mod">
-        <pc:chgData name="Matthieu De Mari" userId="dfb708c9-d8dc-439f-9a3b-c772bf4a311c" providerId="ADAL" clId="{A43FC9A0-DA79-4390-BD87-6FC76071A2D1}" dt="2025-02-05T05:46:15.370" v="4296" actId="20577"/>
-        <pc:sldMkLst>
-          <pc:docMk/>
-          <pc:sldMk cId="842560086" sldId="719"/>
-        </pc:sldMkLst>
-        <pc:spChg chg="mod">
-          <ac:chgData name="Matthieu De Mari" userId="dfb708c9-d8dc-439f-9a3b-c772bf4a311c" providerId="ADAL" clId="{A43FC9A0-DA79-4390-BD87-6FC76071A2D1}" dt="2025-02-05T05:46:15.370" v="4296" actId="20577"/>
-          <ac:spMkLst>
-            <pc:docMk/>
-            <pc:sldMk cId="842560086" sldId="719"/>
-            <ac:spMk id="3" creationId="{3256CF06-4E4F-82B5-2B13-439FB733106E}"/>
-          </ac:spMkLst>
-        </pc:spChg>
-      </pc:sldChg>
-    </pc:docChg>
-  </pc:docChgLst>
-  <pc:docChgLst>
-    <pc:chgData name="Matthieu De Mari" userId="dfb708c9-d8dc-439f-9a3b-c772bf4a311c" providerId="ADAL" clId="{3E44ADA2-A345-4C7C-802A-87952D8E8E25}"/>
-    <pc:docChg chg="custSel addSld delSld modSld modSection">
-      <pc:chgData name="Matthieu De Mari" userId="dfb708c9-d8dc-439f-9a3b-c772bf4a311c" providerId="ADAL" clId="{3E44ADA2-A345-4C7C-802A-87952D8E8E25}" dt="2025-04-09T09:24:13.410" v="1273" actId="207"/>
-      <pc:docMkLst>
-        <pc:docMk/>
-      </pc:docMkLst>
-      <pc:sldChg chg="modSp del mod">
-        <pc:chgData name="Matthieu De Mari" userId="dfb708c9-d8dc-439f-9a3b-c772bf4a311c" providerId="ADAL" clId="{3E44ADA2-A345-4C7C-802A-87952D8E8E25}" dt="2025-04-09T09:24:07.640" v="1272" actId="47"/>
-        <pc:sldMkLst>
-          <pc:docMk/>
-          <pc:sldMk cId="3961348234" sldId="257"/>
-        </pc:sldMkLst>
-        <pc:spChg chg="mod">
-          <ac:chgData name="Matthieu De Mari" userId="dfb708c9-d8dc-439f-9a3b-c772bf4a311c" providerId="ADAL" clId="{3E44ADA2-A345-4C7C-802A-87952D8E8E25}" dt="2025-04-09T09:23:06.139" v="1269" actId="113"/>
-          <ac:spMkLst>
-            <pc:docMk/>
-            <pc:sldMk cId="3961348234" sldId="257"/>
-            <ac:spMk id="3" creationId="{35995840-A9D9-479A-A34F-EA7DC229D38E}"/>
-          </ac:spMkLst>
-        </pc:spChg>
-      </pc:sldChg>
-      <pc:sldChg chg="modSp mod">
-        <pc:chgData name="Matthieu De Mari" userId="dfb708c9-d8dc-439f-9a3b-c772bf4a311c" providerId="ADAL" clId="{3E44ADA2-A345-4C7C-802A-87952D8E8E25}" dt="2025-04-04T11:04:55.906" v="49" actId="20577"/>
-        <pc:sldMkLst>
-          <pc:docMk/>
-          <pc:sldMk cId="1235188203" sldId="609"/>
-        </pc:sldMkLst>
-        <pc:spChg chg="mod">
-          <ac:chgData name="Matthieu De Mari" userId="dfb708c9-d8dc-439f-9a3b-c772bf4a311c" providerId="ADAL" clId="{3E44ADA2-A345-4C7C-802A-87952D8E8E25}" dt="2025-04-04T11:04:55.906" v="49" actId="20577"/>
-          <ac:spMkLst>
-            <pc:docMk/>
-            <pc:sldMk cId="1235188203" sldId="609"/>
-            <ac:spMk id="4" creationId="{1AAED375-7E41-42A6-B735-F3D5A7E83785}"/>
-          </ac:spMkLst>
-        </pc:spChg>
-      </pc:sldChg>
-      <pc:sldChg chg="modSp">
-        <pc:chgData name="Matthieu De Mari" userId="dfb708c9-d8dc-439f-9a3b-c772bf4a311c" providerId="ADAL" clId="{3E44ADA2-A345-4C7C-802A-87952D8E8E25}" dt="2025-04-04T11:04:26.012" v="0"/>
-        <pc:sldMkLst>
-          <pc:docMk/>
-          <pc:sldMk cId="4283000246" sldId="618"/>
-        </pc:sldMkLst>
-        <pc:spChg chg="mod">
-          <ac:chgData name="Matthieu De Mari" userId="dfb708c9-d8dc-439f-9a3b-c772bf4a311c" providerId="ADAL" clId="{3E44ADA2-A345-4C7C-802A-87952D8E8E25}" dt="2025-04-04T11:04:26.012" v="0"/>
-          <ac:spMkLst>
-            <pc:docMk/>
-            <pc:sldMk cId="4283000246" sldId="618"/>
-            <ac:spMk id="4" creationId="{1AAED375-7E41-42A6-B735-F3D5A7E83785}"/>
-          </ac:spMkLst>
-        </pc:spChg>
-      </pc:sldChg>
-      <pc:sldChg chg="modSp">
-        <pc:chgData name="Matthieu De Mari" userId="dfb708c9-d8dc-439f-9a3b-c772bf4a311c" providerId="ADAL" clId="{3E44ADA2-A345-4C7C-802A-87952D8E8E25}" dt="2025-04-04T11:08:45.354" v="109" actId="20577"/>
-        <pc:sldMkLst>
-          <pc:docMk/>
-          <pc:sldMk cId="145938198" sldId="630"/>
-        </pc:sldMkLst>
-        <pc:spChg chg="mod">
-          <ac:chgData name="Matthieu De Mari" userId="dfb708c9-d8dc-439f-9a3b-c772bf4a311c" providerId="ADAL" clId="{3E44ADA2-A345-4C7C-802A-87952D8E8E25}" dt="2025-04-04T11:08:45.354" v="109" actId="20577"/>
-          <ac:spMkLst>
-            <pc:docMk/>
-            <pc:sldMk cId="145938198" sldId="630"/>
-            <ac:spMk id="3" creationId="{18F81686-D0E3-4F7E-9DF0-29DC137713E7}"/>
-          </ac:spMkLst>
-        </pc:spChg>
-      </pc:sldChg>
-      <pc:sldChg chg="modSp">
-        <pc:chgData name="Matthieu De Mari" userId="dfb708c9-d8dc-439f-9a3b-c772bf4a311c" providerId="ADAL" clId="{3E44ADA2-A345-4C7C-802A-87952D8E8E25}" dt="2025-04-04T11:06:10.756" v="62" actId="20577"/>
-        <pc:sldMkLst>
-          <pc:docMk/>
-          <pc:sldMk cId="3971470198" sldId="685"/>
-        </pc:sldMkLst>
-        <pc:spChg chg="mod">
-          <ac:chgData name="Matthieu De Mari" userId="dfb708c9-d8dc-439f-9a3b-c772bf4a311c" providerId="ADAL" clId="{3E44ADA2-A345-4C7C-802A-87952D8E8E25}" dt="2025-04-04T11:06:10.756" v="62" actId="20577"/>
-          <ac:spMkLst>
-            <pc:docMk/>
-            <pc:sldMk cId="3971470198" sldId="685"/>
-            <ac:spMk id="3" creationId="{B6B1E547-86BB-4723-80F3-6238130DC1D5}"/>
-          </ac:spMkLst>
-        </pc:spChg>
-      </pc:sldChg>
-      <pc:sldChg chg="del">
-        <pc:chgData name="Matthieu De Mari" userId="dfb708c9-d8dc-439f-9a3b-c772bf4a311c" providerId="ADAL" clId="{3E44ADA2-A345-4C7C-802A-87952D8E8E25}" dt="2025-04-09T09:24:06.949" v="1271" actId="47"/>
-        <pc:sldMkLst>
-          <pc:docMk/>
-          <pc:sldMk cId="3442501962" sldId="691"/>
-        </pc:sldMkLst>
-      </pc:sldChg>
-      <pc:sldChg chg="modSp mod">
-        <pc:chgData name="Matthieu De Mari" userId="dfb708c9-d8dc-439f-9a3b-c772bf4a311c" providerId="ADAL" clId="{3E44ADA2-A345-4C7C-802A-87952D8E8E25}" dt="2025-04-04T11:05:21.580" v="51" actId="20577"/>
-        <pc:sldMkLst>
-          <pc:docMk/>
-          <pc:sldMk cId="577617240" sldId="699"/>
-        </pc:sldMkLst>
-        <pc:spChg chg="mod">
-          <ac:chgData name="Matthieu De Mari" userId="dfb708c9-d8dc-439f-9a3b-c772bf4a311c" providerId="ADAL" clId="{3E44ADA2-A345-4C7C-802A-87952D8E8E25}" dt="2025-04-04T11:05:21.580" v="51" actId="20577"/>
-          <ac:spMkLst>
-            <pc:docMk/>
-            <pc:sldMk cId="577617240" sldId="699"/>
-            <ac:spMk id="3" creationId="{DCC78D61-B1D6-25B2-0E28-75BB56875C31}"/>
-          </ac:spMkLst>
-        </pc:spChg>
-      </pc:sldChg>
-      <pc:sldChg chg="modSp mod">
-        <pc:chgData name="Matthieu De Mari" userId="dfb708c9-d8dc-439f-9a3b-c772bf4a311c" providerId="ADAL" clId="{3E44ADA2-A345-4C7C-802A-87952D8E8E25}" dt="2025-04-04T11:05:29.951" v="53" actId="20577"/>
-        <pc:sldMkLst>
-          <pc:docMk/>
-          <pc:sldMk cId="1354855761" sldId="700"/>
-        </pc:sldMkLst>
-        <pc:spChg chg="mod">
-          <ac:chgData name="Matthieu De Mari" userId="dfb708c9-d8dc-439f-9a3b-c772bf4a311c" providerId="ADAL" clId="{3E44ADA2-A345-4C7C-802A-87952D8E8E25}" dt="2025-04-04T11:05:29.951" v="53" actId="20577"/>
-          <ac:spMkLst>
-            <pc:docMk/>
-            <pc:sldMk cId="1354855761" sldId="700"/>
-            <ac:spMk id="3" creationId="{C9B4058C-31FC-CDDD-0143-034462C83BE6}"/>
-          </ac:spMkLst>
-        </pc:spChg>
-      </pc:sldChg>
-      <pc:sldChg chg="modSp mod">
-        <pc:chgData name="Matthieu De Mari" userId="dfb708c9-d8dc-439f-9a3b-c772bf4a311c" providerId="ADAL" clId="{3E44ADA2-A345-4C7C-802A-87952D8E8E25}" dt="2025-04-04T11:05:41.616" v="57" actId="20577"/>
-        <pc:sldMkLst>
-          <pc:docMk/>
-          <pc:sldMk cId="1776743013" sldId="701"/>
-        </pc:sldMkLst>
-        <pc:spChg chg="mod">
-          <ac:chgData name="Matthieu De Mari" userId="dfb708c9-d8dc-439f-9a3b-c772bf4a311c" providerId="ADAL" clId="{3E44ADA2-A345-4C7C-802A-87952D8E8E25}" dt="2025-04-04T11:05:41.616" v="57" actId="20577"/>
-          <ac:spMkLst>
-            <pc:docMk/>
-            <pc:sldMk cId="1776743013" sldId="701"/>
-            <ac:spMk id="3" creationId="{C67A432A-A3B4-9BC0-DFBA-A7624917FE87}"/>
-          </ac:spMkLst>
-        </pc:spChg>
-      </pc:sldChg>
-      <pc:sldChg chg="modSp mod">
-        <pc:chgData name="Matthieu De Mari" userId="dfb708c9-d8dc-439f-9a3b-c772bf4a311c" providerId="ADAL" clId="{3E44ADA2-A345-4C7C-802A-87952D8E8E25}" dt="2025-04-04T11:05:36.765" v="55" actId="20577"/>
-        <pc:sldMkLst>
-          <pc:docMk/>
-          <pc:sldMk cId="641657007" sldId="702"/>
-        </pc:sldMkLst>
-        <pc:spChg chg="mod">
-          <ac:chgData name="Matthieu De Mari" userId="dfb708c9-d8dc-439f-9a3b-c772bf4a311c" providerId="ADAL" clId="{3E44ADA2-A345-4C7C-802A-87952D8E8E25}" dt="2025-04-04T11:05:36.765" v="55" actId="20577"/>
-          <ac:spMkLst>
-            <pc:docMk/>
-            <pc:sldMk cId="641657007" sldId="702"/>
-            <ac:spMk id="3" creationId="{ADFCE0FF-B6CB-D1E7-81E8-66ED70AD2511}"/>
-          </ac:spMkLst>
-        </pc:spChg>
-      </pc:sldChg>
-      <pc:sldChg chg="modSp">
-        <pc:chgData name="Matthieu De Mari" userId="dfb708c9-d8dc-439f-9a3b-c772bf4a311c" providerId="ADAL" clId="{3E44ADA2-A345-4C7C-802A-87952D8E8E25}" dt="2025-04-04T11:06:55.237" v="64" actId="20577"/>
-        <pc:sldMkLst>
-          <pc:docMk/>
-          <pc:sldMk cId="3141222053" sldId="705"/>
-        </pc:sldMkLst>
-        <pc:spChg chg="mod">
-          <ac:chgData name="Matthieu De Mari" userId="dfb708c9-d8dc-439f-9a3b-c772bf4a311c" providerId="ADAL" clId="{3E44ADA2-A345-4C7C-802A-87952D8E8E25}" dt="2025-04-04T11:06:55.237" v="64" actId="20577"/>
-          <ac:spMkLst>
-            <pc:docMk/>
-            <pc:sldMk cId="3141222053" sldId="705"/>
-            <ac:spMk id="3" creationId="{26F687EF-1577-CF8B-15B5-008770D7A019}"/>
-          </ac:spMkLst>
-        </pc:spChg>
-      </pc:sldChg>
-      <pc:sldChg chg="modSp mod">
-        <pc:chgData name="Matthieu De Mari" userId="dfb708c9-d8dc-439f-9a3b-c772bf4a311c" providerId="ADAL" clId="{3E44ADA2-A345-4C7C-802A-87952D8E8E25}" dt="2025-04-04T11:07:20.697" v="69" actId="27636"/>
-        <pc:sldMkLst>
-          <pc:docMk/>
-          <pc:sldMk cId="1397436905" sldId="706"/>
-        </pc:sldMkLst>
-        <pc:spChg chg="mod">
-          <ac:chgData name="Matthieu De Mari" userId="dfb708c9-d8dc-439f-9a3b-c772bf4a311c" providerId="ADAL" clId="{3E44ADA2-A345-4C7C-802A-87952D8E8E25}" dt="2025-04-04T11:07:20.697" v="69" actId="27636"/>
-          <ac:spMkLst>
-            <pc:docMk/>
-            <pc:sldMk cId="1397436905" sldId="706"/>
-            <ac:spMk id="3" creationId="{EC3A3FFB-E011-8262-55AD-05C7D13F6D49}"/>
-          </ac:spMkLst>
-        </pc:spChg>
-      </pc:sldChg>
-      <pc:sldChg chg="modSp mod">
-        <pc:chgData name="Matthieu De Mari" userId="dfb708c9-d8dc-439f-9a3b-c772bf4a311c" providerId="ADAL" clId="{3E44ADA2-A345-4C7C-802A-87952D8E8E25}" dt="2025-04-04T11:10:18.487" v="110" actId="20577"/>
-        <pc:sldMkLst>
-          <pc:docMk/>
-          <pc:sldMk cId="389079815" sldId="717"/>
-        </pc:sldMkLst>
-        <pc:spChg chg="mod">
-          <ac:chgData name="Matthieu De Mari" userId="dfb708c9-d8dc-439f-9a3b-c772bf4a311c" providerId="ADAL" clId="{3E44ADA2-A345-4C7C-802A-87952D8E8E25}" dt="2025-04-04T11:10:18.487" v="110" actId="20577"/>
-          <ac:spMkLst>
-            <pc:docMk/>
-            <pc:sldMk cId="389079815" sldId="717"/>
-            <ac:spMk id="3" creationId="{AA5D6F6B-8C8A-6A7C-D967-C3D509244FF7}"/>
-          </ac:spMkLst>
-        </pc:spChg>
-      </pc:sldChg>
-      <pc:sldChg chg="modSp mod">
-        <pc:chgData name="Matthieu De Mari" userId="dfb708c9-d8dc-439f-9a3b-c772bf4a311c" providerId="ADAL" clId="{3E44ADA2-A345-4C7C-802A-87952D8E8E25}" dt="2025-04-04T11:11:02.846" v="191" actId="20577"/>
-        <pc:sldMkLst>
-          <pc:docMk/>
-          <pc:sldMk cId="842560086" sldId="719"/>
-        </pc:sldMkLst>
-        <pc:spChg chg="mod">
-          <ac:chgData name="Matthieu De Mari" userId="dfb708c9-d8dc-439f-9a3b-c772bf4a311c" providerId="ADAL" clId="{3E44ADA2-A345-4C7C-802A-87952D8E8E25}" dt="2025-04-04T11:11:02.846" v="191" actId="20577"/>
-          <ac:spMkLst>
-            <pc:docMk/>
-            <pc:sldMk cId="842560086" sldId="719"/>
-            <ac:spMk id="3" creationId="{3256CF06-4E4F-82B5-2B13-439FB733106E}"/>
-          </ac:spMkLst>
-        </pc:spChg>
-      </pc:sldChg>
-      <pc:sldChg chg="modSp add mod">
-        <pc:chgData name="Matthieu De Mari" userId="dfb708c9-d8dc-439f-9a3b-c772bf4a311c" providerId="ADAL" clId="{3E44ADA2-A345-4C7C-802A-87952D8E8E25}" dt="2025-04-04T11:07:29.738" v="72" actId="20577"/>
-        <pc:sldMkLst>
-          <pc:docMk/>
-          <pc:sldMk cId="3771332693" sldId="720"/>
-        </pc:sldMkLst>
-        <pc:spChg chg="mod">
-          <ac:chgData name="Matthieu De Mari" userId="dfb708c9-d8dc-439f-9a3b-c772bf4a311c" providerId="ADAL" clId="{3E44ADA2-A345-4C7C-802A-87952D8E8E25}" dt="2025-04-04T11:07:29.738" v="72" actId="20577"/>
-          <ac:spMkLst>
-            <pc:docMk/>
-            <pc:sldMk cId="3771332693" sldId="720"/>
-            <ac:spMk id="3" creationId="{CF999C8D-E09D-0B64-B081-AE668ECF46A5}"/>
-          </ac:spMkLst>
-        </pc:spChg>
-      </pc:sldChg>
-      <pc:sldChg chg="addSp delSp modSp new mod">
-        <pc:chgData name="Matthieu De Mari" userId="dfb708c9-d8dc-439f-9a3b-c772bf4a311c" providerId="ADAL" clId="{3E44ADA2-A345-4C7C-802A-87952D8E8E25}" dt="2025-04-04T11:19:28.434" v="639" actId="1036"/>
-        <pc:sldMkLst>
-          <pc:docMk/>
-          <pc:sldMk cId="1862528593" sldId="721"/>
-        </pc:sldMkLst>
-        <pc:spChg chg="mod">
-          <ac:chgData name="Matthieu De Mari" userId="dfb708c9-d8dc-439f-9a3b-c772bf4a311c" providerId="ADAL" clId="{3E44ADA2-A345-4C7C-802A-87952D8E8E25}" dt="2025-04-04T11:11:19.740" v="227" actId="20577"/>
-          <ac:spMkLst>
-            <pc:docMk/>
-            <pc:sldMk cId="1862528593" sldId="721"/>
-            <ac:spMk id="2" creationId="{E1499088-8CDA-A190-37D6-76D475454FE8}"/>
-          </ac:spMkLst>
-        </pc:spChg>
-        <pc:spChg chg="mod">
-          <ac:chgData name="Matthieu De Mari" userId="dfb708c9-d8dc-439f-9a3b-c772bf4a311c" providerId="ADAL" clId="{3E44ADA2-A345-4C7C-802A-87952D8E8E25}" dt="2025-04-04T11:19:04.441" v="613" actId="14100"/>
-          <ac:spMkLst>
-            <pc:docMk/>
-            <pc:sldMk cId="1862528593" sldId="721"/>
-            <ac:spMk id="3" creationId="{9F19AC84-B9B7-A8E3-817F-E31B4199A386}"/>
-          </ac:spMkLst>
-        </pc:spChg>
-        <pc:picChg chg="add mod modCrop">
-          <ac:chgData name="Matthieu De Mari" userId="dfb708c9-d8dc-439f-9a3b-c772bf4a311c" providerId="ADAL" clId="{3E44ADA2-A345-4C7C-802A-87952D8E8E25}" dt="2025-04-04T11:19:28.434" v="639" actId="1036"/>
-          <ac:picMkLst>
-            <pc:docMk/>
-            <pc:sldMk cId="1862528593" sldId="721"/>
-            <ac:picMk id="6" creationId="{B1826BE0-0985-3C58-3926-025A3A2B18EF}"/>
-          </ac:picMkLst>
-        </pc:picChg>
-        <pc:picChg chg="add mod modCrop">
-          <ac:chgData name="Matthieu De Mari" userId="dfb708c9-d8dc-439f-9a3b-c772bf4a311c" providerId="ADAL" clId="{3E44ADA2-A345-4C7C-802A-87952D8E8E25}" dt="2025-04-04T11:19:23.682" v="627" actId="1037"/>
-          <ac:picMkLst>
-            <pc:docMk/>
-            <pc:sldMk cId="1862528593" sldId="721"/>
-            <ac:picMk id="8" creationId="{AB040AA9-735D-AA1F-CA90-1CED5A4BFCBE}"/>
-          </ac:picMkLst>
-        </pc:picChg>
-        <pc:picChg chg="add mod">
-          <ac:chgData name="Matthieu De Mari" userId="dfb708c9-d8dc-439f-9a3b-c772bf4a311c" providerId="ADAL" clId="{3E44ADA2-A345-4C7C-802A-87952D8E8E25}" dt="2025-04-04T11:19:08.656" v="614" actId="1076"/>
-          <ac:picMkLst>
-            <pc:docMk/>
-            <pc:sldMk cId="1862528593" sldId="721"/>
-            <ac:picMk id="11" creationId="{F3C21459-FE83-2C98-0F0E-EB92991C0A14}"/>
-          </ac:picMkLst>
-        </pc:picChg>
-      </pc:sldChg>
-      <pc:sldChg chg="addSp delSp modSp add mod modClrScheme chgLayout">
-        <pc:chgData name="Matthieu De Mari" userId="dfb708c9-d8dc-439f-9a3b-c772bf4a311c" providerId="ADAL" clId="{3E44ADA2-A345-4C7C-802A-87952D8E8E25}" dt="2025-04-06T05:18:57.684" v="1195" actId="20577"/>
-        <pc:sldMkLst>
-          <pc:docMk/>
-          <pc:sldMk cId="2367431123" sldId="722"/>
-        </pc:sldMkLst>
-        <pc:spChg chg="mod ord">
-          <ac:chgData name="Matthieu De Mari" userId="dfb708c9-d8dc-439f-9a3b-c772bf4a311c" providerId="ADAL" clId="{3E44ADA2-A345-4C7C-802A-87952D8E8E25}" dt="2025-04-04T11:22:44.214" v="1113" actId="700"/>
-          <ac:spMkLst>
-            <pc:docMk/>
-            <pc:sldMk cId="2367431123" sldId="722"/>
-            <ac:spMk id="2" creationId="{440F3437-B372-5CDB-EE7A-0F2A2D88AB17}"/>
-          </ac:spMkLst>
-        </pc:spChg>
-        <pc:spChg chg="mod ord">
-          <ac:chgData name="Matthieu De Mari" userId="dfb708c9-d8dc-439f-9a3b-c772bf4a311c" providerId="ADAL" clId="{3E44ADA2-A345-4C7C-802A-87952D8E8E25}" dt="2025-04-06T05:18:57.684" v="1195" actId="20577"/>
-          <ac:spMkLst>
-            <pc:docMk/>
-            <pc:sldMk cId="2367431123" sldId="722"/>
-            <ac:spMk id="3" creationId="{8F4C18DB-97EB-2F69-D300-49F5747997F1}"/>
-          </ac:spMkLst>
-        </pc:spChg>
-      </pc:sldChg>
-      <pc:sldChg chg="modSp add mod">
-        <pc:chgData name="Matthieu De Mari" userId="dfb708c9-d8dc-439f-9a3b-c772bf4a311c" providerId="ADAL" clId="{3E44ADA2-A345-4C7C-802A-87952D8E8E25}" dt="2025-04-09T09:24:13.410" v="1273" actId="207"/>
-        <pc:sldMkLst>
-          <pc:docMk/>
-          <pc:sldMk cId="392073205" sldId="723"/>
-        </pc:sldMkLst>
-        <pc:spChg chg="mod">
-          <ac:chgData name="Matthieu De Mari" userId="dfb708c9-d8dc-439f-9a3b-c772bf4a311c" providerId="ADAL" clId="{3E44ADA2-A345-4C7C-802A-87952D8E8E25}" dt="2025-04-09T09:24:13.410" v="1273" actId="207"/>
-          <ac:spMkLst>
-            <pc:docMk/>
-            <pc:sldMk cId="392073205" sldId="723"/>
-            <ac:spMk id="3" creationId="{35995840-A9D9-479A-A34F-EA7DC229D38E}"/>
-          </ac:spMkLst>
-        </pc:spChg>
-      </pc:sldChg>
-      <pc:sldChg chg="add">
-        <pc:chgData name="Matthieu De Mari" userId="dfb708c9-d8dc-439f-9a3b-c772bf4a311c" providerId="ADAL" clId="{3E44ADA2-A345-4C7C-802A-87952D8E8E25}" dt="2025-04-09T09:24:05.301" v="1270"/>
-        <pc:sldMkLst>
-          <pc:docMk/>
-          <pc:sldMk cId="4006346206" sldId="724"/>
-        </pc:sldMkLst>
       </pc:sldChg>
     </pc:docChg>
   </pc:docChgLst>
@@ -8286,7 +6487,7 @@
           <a:p>
             <a:fld id="{61478373-EB31-4867-8CF0-FA31364748A5}" type="datetimeFigureOut">
               <a:rPr lang="en-GB" smtClean="0"/>
-              <a:t>09/04/2025</a:t>
+              <a:t>24/02/2026</a:t>
             </a:fld>
             <a:endParaRPr lang="en-GB"/>
           </a:p>
@@ -8703,7 +6904,7 @@
           <a:p>
             <a:fld id="{E85DF616-B21E-4EF6-A6A5-95E2FB3EB1A1}" type="datetimeFigureOut">
               <a:rPr lang="en-GB" smtClean="0"/>
-              <a:t>09/04/2025</a:t>
+              <a:t>24/02/2026</a:t>
             </a:fld>
             <a:endParaRPr lang="en-GB"/>
           </a:p>
@@ -8903,7 +7104,7 @@
           <a:p>
             <a:fld id="{E85DF616-B21E-4EF6-A6A5-95E2FB3EB1A1}" type="datetimeFigureOut">
               <a:rPr lang="en-GB" smtClean="0"/>
-              <a:t>09/04/2025</a:t>
+              <a:t>24/02/2026</a:t>
             </a:fld>
             <a:endParaRPr lang="en-GB"/>
           </a:p>
@@ -9113,7 +7314,7 @@
           <a:p>
             <a:fld id="{E85DF616-B21E-4EF6-A6A5-95E2FB3EB1A1}" type="datetimeFigureOut">
               <a:rPr lang="en-GB" smtClean="0"/>
-              <a:t>09/04/2025</a:t>
+              <a:t>24/02/2026</a:t>
             </a:fld>
             <a:endParaRPr lang="en-GB"/>
           </a:p>
@@ -9313,7 +7514,7 @@
           <a:p>
             <a:fld id="{E85DF616-B21E-4EF6-A6A5-95E2FB3EB1A1}" type="datetimeFigureOut">
               <a:rPr lang="en-GB" smtClean="0"/>
-              <a:t>09/04/2025</a:t>
+              <a:t>24/02/2026</a:t>
             </a:fld>
             <a:endParaRPr lang="en-GB"/>
           </a:p>
@@ -9589,7 +7790,7 @@
           <a:p>
             <a:fld id="{E85DF616-B21E-4EF6-A6A5-95E2FB3EB1A1}" type="datetimeFigureOut">
               <a:rPr lang="en-GB" smtClean="0"/>
-              <a:t>09/04/2025</a:t>
+              <a:t>24/02/2026</a:t>
             </a:fld>
             <a:endParaRPr lang="en-GB"/>
           </a:p>
@@ -9857,7 +8058,7 @@
           <a:p>
             <a:fld id="{E85DF616-B21E-4EF6-A6A5-95E2FB3EB1A1}" type="datetimeFigureOut">
               <a:rPr lang="en-GB" smtClean="0"/>
-              <a:t>09/04/2025</a:t>
+              <a:t>24/02/2026</a:t>
             </a:fld>
             <a:endParaRPr lang="en-GB"/>
           </a:p>
@@ -10272,7 +8473,7 @@
           <a:p>
             <a:fld id="{E85DF616-B21E-4EF6-A6A5-95E2FB3EB1A1}" type="datetimeFigureOut">
               <a:rPr lang="en-GB" smtClean="0"/>
-              <a:t>09/04/2025</a:t>
+              <a:t>24/02/2026</a:t>
             </a:fld>
             <a:endParaRPr lang="en-GB"/>
           </a:p>
@@ -10414,7 +8615,7 @@
           <a:p>
             <a:fld id="{E85DF616-B21E-4EF6-A6A5-95E2FB3EB1A1}" type="datetimeFigureOut">
               <a:rPr lang="en-GB" smtClean="0"/>
-              <a:t>09/04/2025</a:t>
+              <a:t>24/02/2026</a:t>
             </a:fld>
             <a:endParaRPr lang="en-GB"/>
           </a:p>
@@ -10527,7 +8728,7 @@
           <a:p>
             <a:fld id="{E85DF616-B21E-4EF6-A6A5-95E2FB3EB1A1}" type="datetimeFigureOut">
               <a:rPr lang="en-GB" smtClean="0"/>
-              <a:t>09/04/2025</a:t>
+              <a:t>24/02/2026</a:t>
             </a:fld>
             <a:endParaRPr lang="en-GB"/>
           </a:p>
@@ -10840,7 +9041,7 @@
           <a:p>
             <a:fld id="{E85DF616-B21E-4EF6-A6A5-95E2FB3EB1A1}" type="datetimeFigureOut">
               <a:rPr lang="en-GB" smtClean="0"/>
-              <a:t>09/04/2025</a:t>
+              <a:t>24/02/2026</a:t>
             </a:fld>
             <a:endParaRPr lang="en-GB"/>
           </a:p>
@@ -11129,7 +9330,7 @@
           <a:p>
             <a:fld id="{E85DF616-B21E-4EF6-A6A5-95E2FB3EB1A1}" type="datetimeFigureOut">
               <a:rPr lang="en-GB" smtClean="0"/>
-              <a:t>09/04/2025</a:t>
+              <a:t>24/02/2026</a:t>
             </a:fld>
             <a:endParaRPr lang="en-GB"/>
           </a:p>
@@ -11372,7 +9573,7 @@
           <a:p>
             <a:fld id="{E85DF616-B21E-4EF6-A6A5-95E2FB3EB1A1}" type="datetimeFigureOut">
               <a:rPr lang="en-GB" smtClean="0"/>
-              <a:t>09/04/2025</a:t>
+              <a:t>24/02/2026</a:t>
             </a:fld>
             <a:endParaRPr lang="en-GB"/>
           </a:p>
@@ -28711,7 +26912,7 @@
           </a:xfrm>
         </p:spPr>
         <p:txBody>
-          <a:bodyPr>
+          <a:bodyPr vert="horz" lIns="91440" tIns="45720" rIns="91440" bIns="45720" rtlCol="0" anchor="t">
             <a:normAutofit/>
           </a:bodyPr>
           <a:lstStyle/>
@@ -28721,7 +26922,15 @@
             </a:pPr>
             <a:r>
               <a:rPr lang="en-GB" dirty="0"/>
-              <a:t>There are however cells that are still problematic... For instance, cell (0, 3) suggests to go left, which is wrong…</a:t>
+              <a:t>There are however cells that are still problematic... For instance, </a:t>
+            </a:r>
+            <a:r>
+              <a:rPr lang="en-GB"/>
+              <a:t>cell (0, 3) suggests to go right, which </a:t>
+            </a:r>
+            <a:r>
+              <a:rPr lang="en-GB" dirty="0"/>
+              <a:t>is wrong…</a:t>
             </a:r>
           </a:p>
           <a:p>
